--- a/Final_Revision/Exam_Practice/FR-L01_Speaking_Workshop_Daily_Life_Food_and_Health.pptx
+++ b/Final_Revision/Exam_Practice/FR-L01_Speaking_Workshop_Daily_Life_Food_and_Health.pptx
@@ -615,7 +615,11 @@
           <a:lstStyle/>
           <a:p>
             <a:r>
-              <a:rPr lang="en-US" dirty="0"/>
+              <a:rPr lang="ar-SA" dirty="0">
+                <a:latin typeface="Amiri" pitchFamily="2" charset="-78"/>
+                <a:ea typeface="Amiri" pitchFamily="2" charset="-78"/>
+                <a:cs typeface="Amiri" pitchFamily="2" charset="-78"/>
+              </a:rPr>
               <a:t>ROLE PLAY C (Develop) — a wellbeing check.
 SET-UP IN THE BREAKOUT ROOM: A = examiner (reads the left column ONLY — the questions, in order), B = candidate (sees the task column; Core may use the help column), C = observer (ticks the feedback checklist). 1 minute preparation, about 3 minutes speaking, 1 minute feedback, then rotate.
 Task ! is the unexpected question: in the exam the candidate has not seen it — the examiner should read it without warning.
@@ -707,7 +711,11 @@
           <a:lstStyle/>
           <a:p>
             <a:r>
-              <a:rPr lang="en-US" dirty="0"/>
+              <a:rPr lang="ar-SA" dirty="0">
+                <a:latin typeface="Amiri" pitchFamily="2" charset="-78"/>
+                <a:ea typeface="Amiri" pitchFamily="2" charset="-78"/>
+                <a:cs typeface="Amiri" pitchFamily="2" charset="-78"/>
+              </a:rPr>
               <a:t>ROLE PLAY D (Stretch) — a radio phone-in.
 SET-UP IN THE BREAKOUT ROOM: A = examiner (reads the left column ONLY — the questions, in order), B = candidate (sees the task column; Core may use the help column), C = observer (ticks the feedback checklist). 1 minute preparation, about 3 minutes speaking, 1 minute feedback, then rotate.
 Task ! is the unexpected question: in the exam the candidate has not seen it — the examiner should read it without warning.
@@ -1243,7 +1251,11 @@
           <a:lstStyle/>
           <a:p>
             <a:r>
-              <a:rPr lang="en-US" dirty="0"/>
+              <a:rPr lang="ar-SA" dirty="0">
+                <a:latin typeface="Amiri" pitchFamily="2" charset="-78"/>
+                <a:ea typeface="Amiri" pitchFamily="2" charset="-78"/>
+                <a:cs typeface="Amiri" pitchFamily="2" charset="-78"/>
+              </a:rPr>
               <a:t>TOPIC CONVERSATION — Core. Examiner asks the questions in order and may add “لِمَاذَا؟ / هَلْ يُمْكِنُ أَنْ تَشْرَحَ أَكْثَرَ؟” to push for more. Candidate aims for one full sentence per question.
 </a:t>
             </a:r>
@@ -1332,7 +1344,11 @@
           <a:lstStyle/>
           <a:p>
             <a:r>
-              <a:rPr lang="en-US" dirty="0"/>
+              <a:rPr lang="ar-SA" dirty="0">
+                <a:latin typeface="Amiri" pitchFamily="2" charset="-78"/>
+                <a:ea typeface="Amiri" pitchFamily="2" charset="-78"/>
+                <a:cs typeface="Amiri" pitchFamily="2" charset="-78"/>
+              </a:rPr>
               <a:t>TOPIC CONVERSATION — Develop. Examiner asks the questions in order and may add “لِمَاذَا؟ / هَلْ يُمْكِنُ أَنْ تَشْرَحَ أَكْثَرَ؟” to push for more. Candidate aims for two or three sentences, with frequency, a reason and two time frames.
 </a:t>
             </a:r>
@@ -1421,7 +1437,11 @@
           <a:lstStyle/>
           <a:p>
             <a:r>
-              <a:rPr lang="en-US" dirty="0"/>
+              <a:rPr lang="ar-SA" dirty="0">
+                <a:latin typeface="Amiri" pitchFamily="2" charset="-78"/>
+                <a:ea typeface="Amiri" pitchFamily="2" charset="-78"/>
+                <a:cs typeface="Amiri" pitchFamily="2" charset="-78"/>
+              </a:rPr>
               <a:t>TOPIC CONVERSATION — Stretch. Examiner asks the questions in order and may add “لِمَاذَا؟ / هَلْ يُمْكِنُ أَنْ تَشْرَحَ أَكْثَرَ؟” to push for more. Candidate aims for a developed answer: opinion, balance, concession and a conditional.
 </a:t>
             </a:r>
@@ -1510,7 +1530,11 @@
           <a:lstStyle/>
           <a:p>
             <a:r>
-              <a:rPr lang="en-US" dirty="0"/>
+              <a:rPr lang="ar-SA" dirty="0">
+                <a:latin typeface="Amiri" pitchFamily="2" charset="-78"/>
+                <a:ea typeface="Amiri" pitchFamily="2" charset="-78"/>
+                <a:cs typeface="Amiri" pitchFamily="2" charset="-78"/>
+              </a:rPr>
               <a:t>WELCOME (1 min) — while students join.
 • Greet each student by name as they arrive: السَّلَامُ عَلَيْكُمْ. Take the register (Pastoral Tracker: attendance 0/1).
 • 2-MINUTE CHECK-IN (SEND training): a private chat to any student who seemed unsettled last lesson — “Are you okay today? 👍 / 👎”.
@@ -2224,7 +2248,11 @@
           <a:lstStyle/>
           <a:p>
             <a:r>
-              <a:rPr lang="en-US" dirty="0"/>
+              <a:rPr lang="ar-SA" dirty="0">
+                <a:latin typeface="Amiri" pitchFamily="2" charset="-78"/>
+                <a:ea typeface="Amiri" pitchFamily="2" charset="-78"/>
+                <a:cs typeface="Amiri" pitchFamily="2" charset="-78"/>
+              </a:rPr>
               <a:t>TEACH (3 min). Role play = precise and complete; conversation = develop. Choral repetition of the repair phrases. To a girl: تُعِيدِي.</a:t>
             </a:r>
             <a:endParaRPr lang="en-US" dirty="0"/>
@@ -2576,7 +2604,11 @@
           <a:lstStyle/>
           <a:p>
             <a:r>
-              <a:rPr lang="en-US" dirty="0"/>
+              <a:rPr lang="ar-SA" dirty="0">
+                <a:latin typeface="Amiri" pitchFamily="2" charset="-78"/>
+                <a:ea typeface="Amiri" pitchFamily="2" charset="-78"/>
+                <a:cs typeface="Amiri" pitchFamily="2" charset="-78"/>
+              </a:rPr>
               <a:t>ROLE PLAY A (Core) — a café.
 SET-UP IN THE BREAKOUT ROOM: A = examiner (reads the left column ONLY — the questions, in order), B = candidate (sees the task column; Core may use the help column), C = observer (ticks the feedback checklist). 1 minute preparation, about 3 minutes speaking, 1 minute feedback, then rotate.
 Task ! is the unexpected question: in the exam the candidate has not seen it — the examiner should read it without warning.
@@ -2668,7 +2700,11 @@
           <a:lstStyle/>
           <a:p>
             <a:r>
-              <a:rPr lang="en-US" dirty="0"/>
+              <a:rPr lang="ar-SA" dirty="0">
+                <a:latin typeface="Amiri" pitchFamily="2" charset="-78"/>
+                <a:ea typeface="Amiri" pitchFamily="2" charset="-78"/>
+                <a:cs typeface="Amiri" pitchFamily="2" charset="-78"/>
+              </a:rPr>
               <a:t>ROLE PLAY B (Core+) — a pharmacy.
 SET-UP IN THE BREAKOUT ROOM: A = examiner (reads the left column ONLY — the questions, in order), B = candidate (sees the task column; Core may use the help column), C = observer (ticks the feedback checklist). 1 minute preparation, about 3 minutes speaking, 1 minute feedback, then rotate.
 Task ! is the unexpected question: in the exam the candidate has not seen it — the examiner should read it without warning.
@@ -3156,6 +3192,7 @@
                   <a:srgbClr val="D4AF37"/>
                 </a:solidFill>
                 <a:latin typeface="Amiri" pitchFamily="2" charset="-78"/>
+                <a:ea typeface="Amiri" pitchFamily="2" charset="-78"/>
                 <a:cs typeface="Amiri" pitchFamily="2" charset="-78"/>
               </a:rPr>
               <a:t>م</a:t>
@@ -3362,6 +3399,7 @@
                   <a:srgbClr val="D4AF37"/>
                 </a:solidFill>
                 <a:latin typeface="Amiri" pitchFamily="2" charset="-78"/>
+                <a:ea typeface="Amiri" pitchFamily="2" charset="-78"/>
                 <a:cs typeface="Amiri" pitchFamily="2" charset="-78"/>
               </a:rPr>
               <a:t>وَرْشَةُ التَّحَدُّثِ — الحَيَاةُ اليَوْمِيَّةُ وَالطَّعَامُ وَالصِّحَّةُ</a:t>
@@ -3819,6 +3857,7 @@
                   <a:srgbClr val="D4AF37"/>
                 </a:solidFill>
                 <a:latin typeface="Amiri" pitchFamily="2" charset="-78"/>
+                <a:ea typeface="Amiri" pitchFamily="2" charset="-78"/>
                 <a:cs typeface="Amiri" pitchFamily="2" charset="-78"/>
               </a:rPr>
               <a:t>م</a:t>
@@ -4139,6 +4178,7 @@
                   <a:srgbClr val="8A6D1E"/>
                 </a:solidFill>
                 <a:latin typeface="Amiri" pitchFamily="2" charset="-78"/>
+                <a:ea typeface="Amiri" pitchFamily="2" charset="-78"/>
                 <a:cs typeface="Amiri" pitchFamily="2" charset="-78"/>
               </a:rPr>
               <a:t>رُوتِينِي وَصِحَّتِي</a:t>
@@ -4419,6 +4459,7 @@
                   <a:srgbClr val="1B3B6F"/>
                 </a:solidFill>
                 <a:latin typeface="Amiri" pitchFamily="2" charset="-78"/>
+                <a:ea typeface="Amiri" pitchFamily="2" charset="-78"/>
                 <a:cs typeface="Amiri" pitchFamily="2" charset="-78"/>
               </a:rPr>
               <a:t>أَسْتَيْقِظُ فِي … ثُمَّ … وَبَعْدَ ذٰلِكَ …</a:t>
@@ -4495,6 +4536,7 @@
                   <a:srgbClr val="1B3B6F"/>
                 </a:solidFill>
                 <a:latin typeface="Amiri" pitchFamily="2" charset="-78"/>
+                <a:ea typeface="Amiri" pitchFamily="2" charset="-78"/>
                 <a:cs typeface="Amiri" pitchFamily="2" charset="-78"/>
               </a:rPr>
               <a:t>صِفْ يَوْمًا عَادِيًّا فِي الأُسْبُوعِ.</a:t>
@@ -4598,6 +4640,7 @@
                   <a:srgbClr val="1B3B6F"/>
                 </a:solidFill>
                 <a:latin typeface="Amiri" pitchFamily="2" charset="-78"/>
+                <a:ea typeface="Amiri" pitchFamily="2" charset="-78"/>
                 <a:cs typeface="Amiri" pitchFamily="2" charset="-78"/>
               </a:rPr>
               <a:t>آكُلُ … دَائِمًا، وَ… أَحْيَانًا، لٰكِنِّي لَا … أَبَدًا</a:t>
@@ -4674,6 +4717,7 @@
                   <a:srgbClr val="1B3B6F"/>
                 </a:solidFill>
                 <a:latin typeface="Amiri" pitchFamily="2" charset="-78"/>
+                <a:ea typeface="Amiri" pitchFamily="2" charset="-78"/>
                 <a:cs typeface="Amiri" pitchFamily="2" charset="-78"/>
               </a:rPr>
               <a:t>وَكَيْفَ تَأْكُلُ؟</a:t>
@@ -4777,6 +4821,7 @@
                   <a:srgbClr val="1B3B6F"/>
                 </a:solidFill>
                 <a:latin typeface="Amiri" pitchFamily="2" charset="-78"/>
+                <a:ea typeface="Amiri" pitchFamily="2" charset="-78"/>
                 <a:cs typeface="Amiri" pitchFamily="2" charset="-78"/>
               </a:rPr>
               <a:t>كُنْتُ … أَمَّا الآنَ فَأَنَامُ …</a:t>
@@ -4853,6 +4898,7 @@
                   <a:srgbClr val="1B3B6F"/>
                 </a:solidFill>
                 <a:latin typeface="Amiri" pitchFamily="2" charset="-78"/>
+                <a:ea typeface="Amiri" pitchFamily="2" charset="-78"/>
                 <a:cs typeface="Amiri" pitchFamily="2" charset="-78"/>
               </a:rPr>
               <a:t>هَلْ تَغَيَّرَتْ عَادَاتُكَ هٰذِهِ السَّنَةَ؟</a:t>
@@ -4956,6 +5002,7 @@
                   <a:srgbClr val="1B3B6F"/>
                 </a:solidFill>
                 <a:latin typeface="Amiri" pitchFamily="2" charset="-78"/>
+                <a:ea typeface="Amiri" pitchFamily="2" charset="-78"/>
                 <a:cs typeface="Amiri" pitchFamily="2" charset="-78"/>
               </a:rPr>
               <a:t>أَلْعَبُ … مَرَّتَيْنِ فِي الأُسْبُوعِ، لِأَنَّ … مِمَّا …</a:t>
@@ -5032,6 +5079,7 @@
                   <a:srgbClr val="1B3B6F"/>
                 </a:solidFill>
                 <a:latin typeface="Amiri" pitchFamily="2" charset="-78"/>
+                <a:ea typeface="Amiri" pitchFamily="2" charset="-78"/>
                 <a:cs typeface="Amiri" pitchFamily="2" charset="-78"/>
               </a:rPr>
               <a:t>هَلْ تُمَارِسُ الرِّيَاضَةَ؟</a:t>
@@ -5135,6 +5183,7 @@
                   <a:srgbClr val="1B3B6F"/>
                 </a:solidFill>
                 <a:latin typeface="Amiri" pitchFamily="2" charset="-78"/>
+                <a:ea typeface="Amiri" pitchFamily="2" charset="-78"/>
                 <a:cs typeface="Amiri" pitchFamily="2" charset="-78"/>
               </a:rPr>
               <a:t>نَمْ … وَكُلْ … وَلَا …</a:t>
@@ -5211,6 +5260,7 @@
                   <a:srgbClr val="1B3B6F"/>
                 </a:solidFill>
                 <a:latin typeface="Amiri" pitchFamily="2" charset="-78"/>
+                <a:ea typeface="Amiri" pitchFamily="2" charset="-78"/>
                 <a:cs typeface="Amiri" pitchFamily="2" charset="-78"/>
               </a:rPr>
               <a:t>مَا نَصِيحَتُكَ لِطَالِبٍ مُتْعَبٍ قَبْلَ الامْتِحَانَاتِ؟</a:t>
@@ -5420,6 +5470,7 @@
                   <a:srgbClr val="D4AF37"/>
                 </a:solidFill>
                 <a:latin typeface="Amiri" pitchFamily="2" charset="-78"/>
+                <a:ea typeface="Amiri" pitchFamily="2" charset="-78"/>
                 <a:cs typeface="Amiri" pitchFamily="2" charset="-78"/>
               </a:rPr>
               <a:t>م</a:t>
@@ -5740,6 +5791,7 @@
                   <a:srgbClr val="8A6D1E"/>
                 </a:solidFill>
                 <a:latin typeface="Amiri" pitchFamily="2" charset="-78"/>
+                <a:ea typeface="Amiri" pitchFamily="2" charset="-78"/>
                 <a:cs typeface="Amiri" pitchFamily="2" charset="-78"/>
               </a:rPr>
               <a:t>هَلْ نَمَطُ حَيَاةِ المُرَاهِقِينَ صِحِّيٌّ؟</a:t>
@@ -6020,6 +6072,7 @@
                   <a:srgbClr val="1B3B6F"/>
                 </a:solidFill>
                 <a:latin typeface="Amiri" pitchFamily="2" charset="-78"/>
+                <a:ea typeface="Amiri" pitchFamily="2" charset="-78"/>
                 <a:cs typeface="Amiri" pitchFamily="2" charset="-78"/>
               </a:rPr>
               <a:t>أُوَافِقُ … ؛ فَالدَّلِيلُ أَنَّ …</a:t>
@@ -6096,6 +6149,7 @@
                   <a:srgbClr val="1B3B6F"/>
                 </a:solidFill>
                 <a:latin typeface="Amiri" pitchFamily="2" charset="-78"/>
+                <a:ea typeface="Amiri" pitchFamily="2" charset="-78"/>
                 <a:cs typeface="Amiri" pitchFamily="2" charset="-78"/>
               </a:rPr>
               <a:t>يَقُولُ الأَطِبَّاءُ إِنَّ المُرَاهِقِينَ يَنَامُونَ قَلِيلًا. مَا رَأْيُكَ؟</a:t>
@@ -6199,6 +6253,7 @@
                   <a:srgbClr val="1B3B6F"/>
                 </a:solidFill>
                 <a:latin typeface="Amiri" pitchFamily="2" charset="-78"/>
+                <a:ea typeface="Amiri" pitchFamily="2" charset="-78"/>
                 <a:cs typeface="Amiri" pitchFamily="2" charset="-78"/>
               </a:rPr>
               <a:t>مِنْ نَاحِيَةٍ … وَمِنْ نَاحِيَةٍ أُخْرَى …</a:t>
@@ -6275,6 +6330,7 @@
                   <a:srgbClr val="1B3B6F"/>
                 </a:solidFill>
                 <a:latin typeface="Amiri" pitchFamily="2" charset="-78"/>
+                <a:ea typeface="Amiri" pitchFamily="2" charset="-78"/>
                 <a:cs typeface="Amiri" pitchFamily="2" charset="-78"/>
               </a:rPr>
               <a:t>وَالطَّعَامُ السَّرِيعُ؟</a:t>
@@ -6378,6 +6434,7 @@
                   <a:srgbClr val="1B3B6F"/>
                 </a:solidFill>
                 <a:latin typeface="Amiri" pitchFamily="2" charset="-78"/>
+                <a:ea typeface="Amiri" pitchFamily="2" charset="-78"/>
                 <a:cs typeface="Amiri" pitchFamily="2" charset="-78"/>
               </a:rPr>
               <a:t>نَعَمْ، فِي … قَرَّرْتُ أَنْ … فَصِرْتُ …</a:t>
@@ -6454,6 +6511,7 @@
                   <a:srgbClr val="1B3B6F"/>
                 </a:solidFill>
                 <a:latin typeface="Amiri" pitchFamily="2" charset="-78"/>
+                <a:ea typeface="Amiri" pitchFamily="2" charset="-78"/>
                 <a:cs typeface="Amiri" pitchFamily="2" charset="-78"/>
               </a:rPr>
               <a:t>هَلْ غَيَّرْتَ أَنْتَ شَيْئًا فِي حَيَاتِكَ؟</a:t>
@@ -6557,6 +6615,7 @@
                   <a:srgbClr val="1B3B6F"/>
                 </a:solidFill>
                 <a:latin typeface="Amiri" pitchFamily="2" charset="-78"/>
+                <a:ea typeface="Amiri" pitchFamily="2" charset="-78"/>
                 <a:cs typeface="Amiri" pitchFamily="2" charset="-78"/>
               </a:rPr>
               <a:t>صَحِيحٌ أَنَّ … غَيْرَ أَنَّ … ؛ لِذٰلِكَ أَقْتَرِحُ أَنْ …</a:t>
@@ -6633,6 +6692,7 @@
                   <a:srgbClr val="1B3B6F"/>
                 </a:solidFill>
                 <a:latin typeface="Amiri" pitchFamily="2" charset="-78"/>
+                <a:ea typeface="Amiri" pitchFamily="2" charset="-78"/>
                 <a:cs typeface="Amiri" pitchFamily="2" charset="-78"/>
               </a:rPr>
               <a:t>لٰكِنَّ الطُّلَّابَ لَيْسَ عِنْدَهُمْ وَقْتٌ!</a:t>
@@ -6736,6 +6796,7 @@
                   <a:srgbClr val="1B3B6F"/>
                 </a:solidFill>
                 <a:latin typeface="Amiri" pitchFamily="2" charset="-78"/>
+                <a:ea typeface="Amiri" pitchFamily="2" charset="-78"/>
                 <a:cs typeface="Amiri" pitchFamily="2" charset="-78"/>
               </a:rPr>
               <a:t>لَوْ كُنْتُ …، لَمَنَعْتُ …</a:t>
@@ -6812,6 +6873,7 @@
                   <a:srgbClr val="1B3B6F"/>
                 </a:solidFill>
                 <a:latin typeface="Amiri" pitchFamily="2" charset="-78"/>
+                <a:ea typeface="Amiri" pitchFamily="2" charset="-78"/>
                 <a:cs typeface="Amiri" pitchFamily="2" charset="-78"/>
               </a:rPr>
               <a:t>لَوْ كُنْتَ وَزِيرَ الصِّحَّةِ، مَاذَا تَفْعَلُ؟</a:t>
@@ -7021,6 +7083,7 @@
                   <a:srgbClr val="D4AF37"/>
                 </a:solidFill>
                 <a:latin typeface="Amiri" pitchFamily="2" charset="-78"/>
+                <a:ea typeface="Amiri" pitchFamily="2" charset="-78"/>
                 <a:cs typeface="Amiri" pitchFamily="2" charset="-78"/>
               </a:rPr>
               <a:t>م</a:t>
@@ -7341,6 +7404,7 @@
                   <a:srgbClr val="8A6D1E"/>
                 </a:solidFill>
                 <a:latin typeface="Amiri" pitchFamily="2" charset="-78"/>
+                <a:ea typeface="Amiri" pitchFamily="2" charset="-78"/>
                 <a:cs typeface="Amiri" pitchFamily="2" charset="-78"/>
               </a:rPr>
               <a:t>وَرَقَةُ المُلَاحِظِ</a:t>
@@ -8811,6 +8875,7 @@
                   <a:srgbClr val="D4AF37"/>
                 </a:solidFill>
                 <a:latin typeface="Amiri" pitchFamily="2" charset="-78"/>
+                <a:ea typeface="Amiri" pitchFamily="2" charset="-78"/>
                 <a:cs typeface="Amiri" pitchFamily="2" charset="-78"/>
               </a:rPr>
               <a:t>م</a:t>
@@ -9131,6 +9196,7 @@
                   <a:srgbClr val="8A6D1E"/>
                 </a:solidFill>
                 <a:latin typeface="Amiri" pitchFamily="2" charset="-78"/>
+                <a:ea typeface="Amiri" pitchFamily="2" charset="-78"/>
                 <a:cs typeface="Amiri" pitchFamily="2" charset="-78"/>
               </a:rPr>
               <a:t>نَمُوذَجُ الإِجَابَةِ</a:t>
@@ -9373,6 +9439,7 @@
                   <a:srgbClr val="1B3B6F"/>
                 </a:solidFill>
                 <a:latin typeface="Amiri" pitchFamily="2" charset="-78"/>
+                <a:ea typeface="Amiri" pitchFamily="2" charset="-78"/>
                 <a:cs typeface="Amiri" pitchFamily="2" charset="-78"/>
               </a:rPr>
               <a:t>نَحْنُ ثَلَاثَةٌ، مِنْ فَضْلِكَ.</a:t>
@@ -9449,6 +9516,7 @@
                   <a:srgbClr val="1B3B6F"/>
                 </a:solidFill>
                 <a:latin typeface="Amiri" pitchFamily="2" charset="-78"/>
+                <a:ea typeface="Amiri" pitchFamily="2" charset="-78"/>
                 <a:cs typeface="Amiri" pitchFamily="2" charset="-78"/>
               </a:rPr>
               <a:t>أَهْلًا وَسَهْلًا! كَمْ شَخْصًا؟</a:t>
@@ -9552,6 +9620,7 @@
                   <a:srgbClr val="1B3B6F"/>
                 </a:solidFill>
                 <a:latin typeface="Amiri" pitchFamily="2" charset="-78"/>
+                <a:ea typeface="Amiri" pitchFamily="2" charset="-78"/>
                 <a:cs typeface="Amiri" pitchFamily="2" charset="-78"/>
               </a:rPr>
               <a:t>أُرِيدُ سَلَطَةً وَدَجَاجًا مَشْوِيًّا، مِنْ فَضْلِكَ.</a:t>
@@ -9628,6 +9697,7 @@
                   <a:srgbClr val="1B3B6F"/>
                 </a:solidFill>
                 <a:latin typeface="Amiri" pitchFamily="2" charset="-78"/>
+                <a:ea typeface="Amiri" pitchFamily="2" charset="-78"/>
                 <a:cs typeface="Amiri" pitchFamily="2" charset="-78"/>
               </a:rPr>
               <a:t>تَفَضَّلُوا. مَاذَا تُرِيدُ أَنْ تَأْكُلَ؟</a:t>
@@ -9731,6 +9801,7 @@
                   <a:srgbClr val="1B3B6F"/>
                 </a:solidFill>
                 <a:latin typeface="Amiri" pitchFamily="2" charset="-78"/>
+                <a:ea typeface="Amiri" pitchFamily="2" charset="-78"/>
                 <a:cs typeface="Amiri" pitchFamily="2" charset="-78"/>
               </a:rPr>
               <a:t>أَشْرَبُ عَصِيرَ بُرْتُقَالٍ.</a:t>
@@ -9807,6 +9878,7 @@
                   <a:srgbClr val="1B3B6F"/>
                 </a:solidFill>
                 <a:latin typeface="Amiri" pitchFamily="2" charset="-78"/>
+                <a:ea typeface="Amiri" pitchFamily="2" charset="-78"/>
                 <a:cs typeface="Amiri" pitchFamily="2" charset="-78"/>
               </a:rPr>
               <a:t>وَمَاذَا تَشْرَبُ؟</a:t>
@@ -9910,6 +9982,7 @@
                   <a:srgbClr val="1B3B6F"/>
                 </a:solidFill>
                 <a:latin typeface="Amiri" pitchFamily="2" charset="-78"/>
+                <a:ea typeface="Amiri" pitchFamily="2" charset="-78"/>
                 <a:cs typeface="Amiri" pitchFamily="2" charset="-78"/>
               </a:rPr>
               <a:t>كَمِ الثَّمَنُ؟</a:t>
@@ -9986,6 +10059,7 @@
                   <a:srgbClr val="1B3B6F"/>
                 </a:solidFill>
                 <a:latin typeface="Amiri" pitchFamily="2" charset="-78"/>
+                <a:ea typeface="Amiri" pitchFamily="2" charset="-78"/>
                 <a:cs typeface="Amiri" pitchFamily="2" charset="-78"/>
               </a:rPr>
               <a:t>حَسَنًا.</a:t>
@@ -10089,6 +10163,7 @@
                   <a:srgbClr val="1B3B6F"/>
                 </a:solidFill>
                 <a:latin typeface="Amiri" pitchFamily="2" charset="-78"/>
+                <a:ea typeface="Amiri" pitchFamily="2" charset="-78"/>
                 <a:cs typeface="Amiri" pitchFamily="2" charset="-78"/>
               </a:rPr>
               <a:t>لَا، آكُلُ فِي المَطْعَمِ مَرَّةً فِي الشَّهْرِ.</a:t>
@@ -10165,6 +10240,7 @@
                   <a:srgbClr val="1B3B6F"/>
                 </a:solidFill>
                 <a:latin typeface="Amiri" pitchFamily="2" charset="-78"/>
+                <a:ea typeface="Amiri" pitchFamily="2" charset="-78"/>
                 <a:cs typeface="Amiri" pitchFamily="2" charset="-78"/>
               </a:rPr>
               <a:t>خَمْسَةَ عَشَرَ جُنَيْهًا. هَلْ تَأْكُلُ فِي المَطَاعِمِ كَثِيرًا؟</a:t>
@@ -10374,6 +10450,7 @@
                   <a:srgbClr val="D4AF37"/>
                 </a:solidFill>
                 <a:latin typeface="Amiri" pitchFamily="2" charset="-78"/>
+                <a:ea typeface="Amiri" pitchFamily="2" charset="-78"/>
                 <a:cs typeface="Amiri" pitchFamily="2" charset="-78"/>
               </a:rPr>
               <a:t>م</a:t>
@@ -10694,6 +10771,7 @@
                   <a:srgbClr val="8A6D1E"/>
                 </a:solidFill>
                 <a:latin typeface="Amiri" pitchFamily="2" charset="-78"/>
+                <a:ea typeface="Amiri" pitchFamily="2" charset="-78"/>
                 <a:cs typeface="Amiri" pitchFamily="2" charset="-78"/>
               </a:rPr>
               <a:t>نَمُوذَجُ الإِجَابَةِ</a:t>
@@ -10936,6 +11014,7 @@
                   <a:srgbClr val="1B3B6F"/>
                 </a:solidFill>
                 <a:latin typeface="Amiri" pitchFamily="2" charset="-78"/>
+                <a:ea typeface="Amiri" pitchFamily="2" charset="-78"/>
                 <a:cs typeface="Amiri" pitchFamily="2" charset="-78"/>
               </a:rPr>
               <a:t>يُؤْلِمُنِي حَلْقِي، وَعِنْدِي حَرَارَةٌ.</a:t>
@@ -11012,6 +11091,7 @@
                   <a:srgbClr val="1B3B6F"/>
                 </a:solidFill>
                 <a:latin typeface="Amiri" pitchFamily="2" charset="-78"/>
+                <a:ea typeface="Amiri" pitchFamily="2" charset="-78"/>
                 <a:cs typeface="Amiri" pitchFamily="2" charset="-78"/>
               </a:rPr>
               <a:t>صَبَاحَ الخَيْرِ، مَاذَا بِكَ؟</a:t>
@@ -11115,6 +11195,7 @@
                   <a:srgbClr val="1B3B6F"/>
                 </a:solidFill>
                 <a:latin typeface="Amiri" pitchFamily="2" charset="-78"/>
+                <a:ea typeface="Amiri" pitchFamily="2" charset="-78"/>
                 <a:cs typeface="Amiri" pitchFamily="2" charset="-78"/>
               </a:rPr>
               <a:t>مُنْذُ يَوْمَيْنِ.</a:t>
@@ -11191,6 +11272,7 @@
                   <a:srgbClr val="1B3B6F"/>
                 </a:solidFill>
                 <a:latin typeface="Amiri" pitchFamily="2" charset="-78"/>
+                <a:ea typeface="Amiri" pitchFamily="2" charset="-78"/>
                 <a:cs typeface="Amiri" pitchFamily="2" charset="-78"/>
               </a:rPr>
               <a:t>مُنْذُ مَتَى؟</a:t>
@@ -11294,6 +11376,7 @@
                   <a:srgbClr val="1B3B6F"/>
                 </a:solidFill>
                 <a:latin typeface="Amiri" pitchFamily="2" charset="-78"/>
+                <a:ea typeface="Amiri" pitchFamily="2" charset="-78"/>
                 <a:cs typeface="Amiri" pitchFamily="2" charset="-78"/>
               </a:rPr>
               <a:t>لَا، لَمْ آخُذْ دَوَاءً، لٰكِنِّي شَرِبْتُ الشَّايَ بِالعَسَلِ.</a:t>
@@ -11370,6 +11453,7 @@
                   <a:srgbClr val="1B3B6F"/>
                 </a:solidFill>
                 <a:latin typeface="Amiri" pitchFamily="2" charset="-78"/>
+                <a:ea typeface="Amiri" pitchFamily="2" charset="-78"/>
                 <a:cs typeface="Amiri" pitchFamily="2" charset="-78"/>
               </a:rPr>
               <a:t>هَلْ أَخَذْتَ دَوَاءً؟</a:t>
@@ -11473,6 +11557,7 @@
                   <a:srgbClr val="1B3B6F"/>
                 </a:solidFill>
                 <a:latin typeface="Amiri" pitchFamily="2" charset="-78"/>
+                <a:ea typeface="Amiri" pitchFamily="2" charset="-78"/>
                 <a:cs typeface="Amiri" pitchFamily="2" charset="-78"/>
               </a:rPr>
               <a:t>كَمْ مَرَّةً آخُذُهُ فِي اليَوْمِ؟</a:t>
@@ -11549,6 +11634,7 @@
                   <a:srgbClr val="1B3B6F"/>
                 </a:solidFill>
                 <a:latin typeface="Amiri" pitchFamily="2" charset="-78"/>
+                <a:ea typeface="Amiri" pitchFamily="2" charset="-78"/>
                 <a:cs typeface="Amiri" pitchFamily="2" charset="-78"/>
               </a:rPr>
               <a:t>خُذْ هٰذَا الدَّوَاءَ.</a:t>
@@ -11652,6 +11738,7 @@
                   <a:srgbClr val="1B3B6F"/>
                 </a:solidFill>
                 <a:latin typeface="Amiri" pitchFamily="2" charset="-78"/>
+                <a:ea typeface="Amiri" pitchFamily="2" charset="-78"/>
                 <a:cs typeface="Amiri" pitchFamily="2" charset="-78"/>
               </a:rPr>
               <a:t>لَا، سَأَبْقَى فِي البَيْتِ، لِأَنِّي أُرِيدُ أَنْ أَرْتَاحَ.</a:t>
@@ -11728,6 +11815,7 @@
                   <a:srgbClr val="1B3B6F"/>
                 </a:solidFill>
                 <a:latin typeface="Amiri" pitchFamily="2" charset="-78"/>
+                <a:ea typeface="Amiri" pitchFamily="2" charset="-78"/>
                 <a:cs typeface="Amiri" pitchFamily="2" charset="-78"/>
               </a:rPr>
               <a:t>ثَلَاثَ مَرَّاتٍ بَعْدَ الأَكْلِ. هَلْ تَذْهَبُ إِلَى المَدْرَسَةِ غَدًا؟</a:t>
@@ -11937,6 +12025,7 @@
                   <a:srgbClr val="D4AF37"/>
                 </a:solidFill>
                 <a:latin typeface="Amiri" pitchFamily="2" charset="-78"/>
+                <a:ea typeface="Amiri" pitchFamily="2" charset="-78"/>
                 <a:cs typeface="Amiri" pitchFamily="2" charset="-78"/>
               </a:rPr>
               <a:t>م</a:t>
@@ -12257,6 +12346,7 @@
                   <a:srgbClr val="8A6D1E"/>
                 </a:solidFill>
                 <a:latin typeface="Amiri" pitchFamily="2" charset="-78"/>
+                <a:ea typeface="Amiri" pitchFamily="2" charset="-78"/>
                 <a:cs typeface="Amiri" pitchFamily="2" charset="-78"/>
               </a:rPr>
               <a:t>نَمُوذَجُ الإِجَابَةِ</a:t>
@@ -12499,6 +12589,7 @@
                   <a:srgbClr val="1B3B6F"/>
                 </a:solidFill>
                 <a:latin typeface="Amiri" pitchFamily="2" charset="-78"/>
+                <a:ea typeface="Amiri" pitchFamily="2" charset="-78"/>
                 <a:cs typeface="Amiri" pitchFamily="2" charset="-78"/>
               </a:rPr>
               <a:t>أَسْتَيْقِظُ فِي السَّادِسَةِ وَالنِّصْفِ، ثُمَّ أُصَلِّي وَأُفْطِرُ، وَبَعْدَ ذٰلِكَ أَذْهَبُ إِلَى المَدْرَسَةِ بِالحَافِلَةِ، وَتَسْتَغْرِقُ الرِّحْلَةُ عِشْرِينَ دَقِيقَةً.</a:t>
@@ -12575,6 +12666,7 @@
                   <a:srgbClr val="1B3B6F"/>
                 </a:solidFill>
                 <a:latin typeface="Amiri" pitchFamily="2" charset="-78"/>
+                <a:ea typeface="Amiri" pitchFamily="2" charset="-78"/>
                 <a:cs typeface="Amiri" pitchFamily="2" charset="-78"/>
               </a:rPr>
               <a:t>صِفْ يَوْمًا عَادِيًّا فِي الأُسْبُوعِ.</a:t>
@@ -12678,6 +12770,7 @@
                   <a:srgbClr val="1B3B6F"/>
                 </a:solidFill>
                 <a:latin typeface="Amiri" pitchFamily="2" charset="-78"/>
+                <a:ea typeface="Amiri" pitchFamily="2" charset="-78"/>
                 <a:cs typeface="Amiri" pitchFamily="2" charset="-78"/>
               </a:rPr>
               <a:t>آكُلُ الخُضَارَ وَالفَوَاكِهَ دَائِمًا، وَالحَلَوِيَّاتِ أَحْيَانًا، لٰكِنِّي لَا أَشْرَبُ المَشْرُوبَاتِ الغَازِيَّةَ أَبَدًا.</a:t>
@@ -12754,6 +12847,7 @@
                   <a:srgbClr val="1B3B6F"/>
                 </a:solidFill>
                 <a:latin typeface="Amiri" pitchFamily="2" charset="-78"/>
+                <a:ea typeface="Amiri" pitchFamily="2" charset="-78"/>
                 <a:cs typeface="Amiri" pitchFamily="2" charset="-78"/>
               </a:rPr>
               <a:t>وَكَيْفَ تَأْكُلُ؟</a:t>
@@ -12857,6 +12951,7 @@
                   <a:srgbClr val="1B3B6F"/>
                 </a:solidFill>
                 <a:latin typeface="Amiri" pitchFamily="2" charset="-78"/>
+                <a:ea typeface="Amiri" pitchFamily="2" charset="-78"/>
                 <a:cs typeface="Amiri" pitchFamily="2" charset="-78"/>
               </a:rPr>
               <a:t>كُنْتُ أَسْهَرُ عَلَى الهَاتِفِ حَتَّى مُنْتَصَفِ اللَّيْلِ، أَمَّا الآنَ فَأَنَامُ فِي العَاشِرَةِ، لِأَنَّ الامْتِحَانَاتِ قَرِيبَةٌ.</a:t>
@@ -12933,6 +13028,7 @@
                   <a:srgbClr val="1B3B6F"/>
                 </a:solidFill>
                 <a:latin typeface="Amiri" pitchFamily="2" charset="-78"/>
+                <a:ea typeface="Amiri" pitchFamily="2" charset="-78"/>
                 <a:cs typeface="Amiri" pitchFamily="2" charset="-78"/>
               </a:rPr>
               <a:t>هَلْ تَغَيَّرَتْ عَادَاتُكَ هٰذِهِ السَّنَةَ؟</a:t>
@@ -13036,6 +13132,7 @@
                   <a:srgbClr val="1B3B6F"/>
                 </a:solidFill>
                 <a:latin typeface="Amiri" pitchFamily="2" charset="-78"/>
+                <a:ea typeface="Amiri" pitchFamily="2" charset="-78"/>
                 <a:cs typeface="Amiri" pitchFamily="2" charset="-78"/>
               </a:rPr>
               <a:t>أَلْعَبُ كُرَةَ السَّلَّةِ مَرَّتَيْنِ فِي الأُسْبُوعِ، لِأَنَّهَا تُخَفِّفُ التَّوَتُّرَ، مِمَّا يُسَاعِدُنِي عَلَى التَّرْكِيزِ.</a:t>
@@ -13112,6 +13209,7 @@
                   <a:srgbClr val="1B3B6F"/>
                 </a:solidFill>
                 <a:latin typeface="Amiri" pitchFamily="2" charset="-78"/>
+                <a:ea typeface="Amiri" pitchFamily="2" charset="-78"/>
                 <a:cs typeface="Amiri" pitchFamily="2" charset="-78"/>
               </a:rPr>
               <a:t>هَلْ تُمَارِسُ الرِّيَاضَةَ؟</a:t>
@@ -13215,6 +13313,7 @@
                   <a:srgbClr val="1B3B6F"/>
                 </a:solidFill>
                 <a:latin typeface="Amiri" pitchFamily="2" charset="-78"/>
+                <a:ea typeface="Amiri" pitchFamily="2" charset="-78"/>
                 <a:cs typeface="Amiri" pitchFamily="2" charset="-78"/>
               </a:rPr>
               <a:t>نَمْ ثَمَانِيَ سَاعَاتٍ، وَكُلْ فُطُورًا صِحِّيًّا، وَلَا تُرَاجِعْ طُولَ اللَّيْلِ.</a:t>
@@ -13291,6 +13390,7 @@
                   <a:srgbClr val="1B3B6F"/>
                 </a:solidFill>
                 <a:latin typeface="Amiri" pitchFamily="2" charset="-78"/>
+                <a:ea typeface="Amiri" pitchFamily="2" charset="-78"/>
                 <a:cs typeface="Amiri" pitchFamily="2" charset="-78"/>
               </a:rPr>
               <a:t>مَا نَصِيحَتُكَ لِطَالِبٍ مُتْعَبٍ قَبْلَ الامْتِحَانَاتِ؟</a:t>
@@ -13500,6 +13600,7 @@
                   <a:srgbClr val="D4AF37"/>
                 </a:solidFill>
                 <a:latin typeface="Amiri" pitchFamily="2" charset="-78"/>
+                <a:ea typeface="Amiri" pitchFamily="2" charset="-78"/>
                 <a:cs typeface="Amiri" pitchFamily="2" charset="-78"/>
               </a:rPr>
               <a:t>م</a:t>
@@ -13820,6 +13921,7 @@
                   <a:srgbClr val="8A6D1E"/>
                 </a:solidFill>
                 <a:latin typeface="Amiri" pitchFamily="2" charset="-78"/>
+                <a:ea typeface="Amiri" pitchFamily="2" charset="-78"/>
                 <a:cs typeface="Amiri" pitchFamily="2" charset="-78"/>
               </a:rPr>
               <a:t>نَمُوذَجُ الإِجَابَةِ</a:t>
@@ -14062,6 +14164,7 @@
                   <a:srgbClr val="1B3B6F"/>
                 </a:solidFill>
                 <a:latin typeface="Amiri" pitchFamily="2" charset="-78"/>
+                <a:ea typeface="Amiri" pitchFamily="2" charset="-78"/>
                 <a:cs typeface="Amiri" pitchFamily="2" charset="-78"/>
               </a:rPr>
               <a:t>أُوَافِقُ تَمَامًا؛ فَالدَّلِيلُ أَنَّ أَكْثَرَ زُمَلَائِي يَسْهَرُونَ عَلَى الشَّاشَاتِ، ثُمَّ يَأْتُونَ إِلَى المَدْرَسَةِ مُتْعَبِينَ.</a:t>
@@ -14141,6 +14244,7 @@
                   <a:srgbClr val="1B3B6F"/>
                 </a:solidFill>
                 <a:latin typeface="Amiri" pitchFamily="2" charset="-78"/>
+                <a:ea typeface="Amiri" pitchFamily="2" charset="-78"/>
                 <a:cs typeface="Amiri" pitchFamily="2" charset="-78"/>
               </a:rPr>
               <a:t>يَقُولُ الأَطِبَّاءُ إِنَّ المُرَاهِقِينَ يَنَامُونَ قَلِيلًا. مَا رَأْيُكَ؟</a:t>
@@ -14244,6 +14348,7 @@
                   <a:srgbClr val="1B3B6F"/>
                 </a:solidFill>
                 <a:latin typeface="Amiri" pitchFamily="2" charset="-78"/>
+                <a:ea typeface="Amiri" pitchFamily="2" charset="-78"/>
                 <a:cs typeface="Amiri" pitchFamily="2" charset="-78"/>
               </a:rPr>
               <a:t>مِنْ نَاحِيَةٍ، هُوَ سَرِيعٌ وَرَخِيصٌ، وَمِنْ نَاحِيَةٍ أُخْرَى، فِيهِ دُهُونٌ وَسُكَّرٌ كَثِيرٌ، مِمَّا يُسَبِّبُ السُّمْنَةَ وَأَمْرَاضَ القَلْبِ.</a:t>
@@ -14320,6 +14425,7 @@
                   <a:srgbClr val="1B3B6F"/>
                 </a:solidFill>
                 <a:latin typeface="Amiri" pitchFamily="2" charset="-78"/>
+                <a:ea typeface="Amiri" pitchFamily="2" charset="-78"/>
                 <a:cs typeface="Amiri" pitchFamily="2" charset="-78"/>
               </a:rPr>
               <a:t>وَالطَّعَامُ السَّرِيعُ؟</a:t>
@@ -14423,6 +14529,7 @@
                   <a:srgbClr val="1B3B6F"/>
                 </a:solidFill>
                 <a:latin typeface="Amiri" pitchFamily="2" charset="-78"/>
+                <a:ea typeface="Amiri" pitchFamily="2" charset="-78"/>
                 <a:cs typeface="Amiri" pitchFamily="2" charset="-78"/>
               </a:rPr>
               <a:t>نَعَمْ، فِي بِدَايَةِ السَّنَةِ قَرَّرْتُ أَنْ أَمْشِيَ إِلَى المَدْرَسَةِ بَدَلًا مِنَ الحَافِلَةِ، فَصِرْتُ أَنْشَطَ، وَتَحَسَّنَ نَوْمِي.</a:t>
@@ -14499,6 +14606,7 @@
                   <a:srgbClr val="1B3B6F"/>
                 </a:solidFill>
                 <a:latin typeface="Amiri" pitchFamily="2" charset="-78"/>
+                <a:ea typeface="Amiri" pitchFamily="2" charset="-78"/>
                 <a:cs typeface="Amiri" pitchFamily="2" charset="-78"/>
               </a:rPr>
               <a:t>هَلْ غَيَّرْتَ أَنْتَ شَيْئًا فِي حَيَاتِكَ؟</a:t>
@@ -14602,6 +14710,7 @@
                   <a:srgbClr val="1B3B6F"/>
                 </a:solidFill>
                 <a:latin typeface="Amiri" pitchFamily="2" charset="-78"/>
+                <a:ea typeface="Amiri" pitchFamily="2" charset="-78"/>
                 <a:cs typeface="Amiri" pitchFamily="2" charset="-78"/>
               </a:rPr>
               <a:t>صَحِيحٌ أَنَّ الوَاجِبَاتِ كَثِيرَةٌ، غَيْرَ أَنَّ الصِّحَّةَ أَسَاسُ النَّجَاحِ؛ لِذٰلِكَ أَقْتَرِحُ أَنْ تُخَصِّصَ المَدَارِسُ سَاعَةً يَوْمِيَّةً لِلرِّيَاضَةِ.</a:t>
@@ -14678,6 +14787,7 @@
                   <a:srgbClr val="1B3B6F"/>
                 </a:solidFill>
                 <a:latin typeface="Amiri" pitchFamily="2" charset="-78"/>
+                <a:ea typeface="Amiri" pitchFamily="2" charset="-78"/>
                 <a:cs typeface="Amiri" pitchFamily="2" charset="-78"/>
               </a:rPr>
               <a:t>لٰكِنَّ الطُّلَّابَ لَيْسَ عِنْدَهُمْ وَقْتٌ!</a:t>
@@ -14781,6 +14891,7 @@
                   <a:srgbClr val="1B3B6F"/>
                 </a:solidFill>
                 <a:latin typeface="Amiri" pitchFamily="2" charset="-78"/>
+                <a:ea typeface="Amiri" pitchFamily="2" charset="-78"/>
                 <a:cs typeface="Amiri" pitchFamily="2" charset="-78"/>
               </a:rPr>
               <a:t>لَوْ كُنْتُ وَزِيرَ الصِّحَّةِ، لَمَنَعْتُ إِعْلَانَاتِ الطَّعَامِ السَّرِيعِ قُرْبَ المَدَارِسِ، وَلَجَعَلْتُ الفَوَاكِهَ مَجَّانِيَّةً فِي المَقَاصِفِ.</a:t>
@@ -14857,6 +14968,7 @@
                   <a:srgbClr val="1B3B6F"/>
                 </a:solidFill>
                 <a:latin typeface="Amiri" pitchFamily="2" charset="-78"/>
+                <a:ea typeface="Amiri" pitchFamily="2" charset="-78"/>
                 <a:cs typeface="Amiri" pitchFamily="2" charset="-78"/>
               </a:rPr>
               <a:t>لَوْ كُنْتَ وَزِيرَ الصِّحَّةِ، مَاذَا تَفْعَلُ؟</a:t>
@@ -15066,6 +15178,7 @@
                   <a:srgbClr val="D4AF37"/>
                 </a:solidFill>
                 <a:latin typeface="Amiri" pitchFamily="2" charset="-78"/>
+                <a:ea typeface="Amiri" pitchFamily="2" charset="-78"/>
                 <a:cs typeface="Amiri" pitchFamily="2" charset="-78"/>
               </a:rPr>
               <a:t>م</a:t>
@@ -15386,6 +15499,7 @@
                   <a:srgbClr val="8A6D1E"/>
                 </a:solidFill>
                 <a:latin typeface="Amiri" pitchFamily="2" charset="-78"/>
+                <a:ea typeface="Amiri" pitchFamily="2" charset="-78"/>
                 <a:cs typeface="Amiri" pitchFamily="2" charset="-78"/>
               </a:rPr>
               <a:t>يَوْمِي وَطَعَامِي</a:t>
@@ -15666,6 +15780,7 @@
                   <a:srgbClr val="1B3B6F"/>
                 </a:solidFill>
                 <a:latin typeface="Amiri" pitchFamily="2" charset="-78"/>
+                <a:ea typeface="Amiri" pitchFamily="2" charset="-78"/>
                 <a:cs typeface="Amiri" pitchFamily="2" charset="-78"/>
               </a:rPr>
               <a:t>أَسْتَيْقِظُ فِي …</a:t>
@@ -15742,6 +15857,7 @@
                   <a:srgbClr val="1B3B6F"/>
                 </a:solidFill>
                 <a:latin typeface="Amiri" pitchFamily="2" charset="-78"/>
+                <a:ea typeface="Amiri" pitchFamily="2" charset="-78"/>
                 <a:cs typeface="Amiri" pitchFamily="2" charset="-78"/>
               </a:rPr>
               <a:t>مَتَى تَسْتَيْقِظُ؟</a:t>
@@ -15910,6 +16026,7 @@
                   <a:srgbClr val="1B3B6F"/>
                 </a:solidFill>
                 <a:latin typeface="Amiri" pitchFamily="2" charset="-78"/>
+                <a:ea typeface="Amiri" pitchFamily="2" charset="-78"/>
                 <a:cs typeface="Amiri" pitchFamily="2" charset="-78"/>
               </a:rPr>
               <a:t>وَجْبَتِي المُفَضَّلَةُ …</a:t>
@@ -15986,6 +16103,7 @@
                   <a:srgbClr val="1B3B6F"/>
                 </a:solidFill>
                 <a:latin typeface="Amiri" pitchFamily="2" charset="-78"/>
+                <a:ea typeface="Amiri" pitchFamily="2" charset="-78"/>
                 <a:cs typeface="Amiri" pitchFamily="2" charset="-78"/>
               </a:rPr>
               <a:t>مَا وَجْبَتُكَ المُفَضَّلَةُ؟</a:t>
@@ -16154,6 +16272,7 @@
                   <a:srgbClr val="1B3B6F"/>
                 </a:solidFill>
                 <a:latin typeface="Amiri" pitchFamily="2" charset="-78"/>
+                <a:ea typeface="Amiri" pitchFamily="2" charset="-78"/>
                 <a:cs typeface="Amiri" pitchFamily="2" charset="-78"/>
               </a:rPr>
               <a:t>أَذْهَبُ …</a:t>
@@ -16230,6 +16349,7 @@
                   <a:srgbClr val="1B3B6F"/>
                 </a:solidFill>
                 <a:latin typeface="Amiri" pitchFamily="2" charset="-78"/>
+                <a:ea typeface="Amiri" pitchFamily="2" charset="-78"/>
                 <a:cs typeface="Amiri" pitchFamily="2" charset="-78"/>
               </a:rPr>
               <a:t>كَيْفَ تَذْهَبُ إِلَى المَدْرَسَةِ؟</a:t>
@@ -16398,6 +16518,7 @@
                   <a:srgbClr val="1B3B6F"/>
                 </a:solidFill>
                 <a:latin typeface="Amiri" pitchFamily="2" charset="-78"/>
+                <a:ea typeface="Amiri" pitchFamily="2" charset="-78"/>
                 <a:cs typeface="Amiri" pitchFamily="2" charset="-78"/>
               </a:rPr>
               <a:t>نَعَمْ، أَلْعَبُ … / …</a:t>
@@ -16474,6 +16595,7 @@
                   <a:srgbClr val="1B3B6F"/>
                 </a:solidFill>
                 <a:latin typeface="Amiri" pitchFamily="2" charset="-78"/>
+                <a:ea typeface="Amiri" pitchFamily="2" charset="-78"/>
                 <a:cs typeface="Amiri" pitchFamily="2" charset="-78"/>
               </a:rPr>
               <a:t>هَلْ تُمَارِسُ الرِّيَاضَةَ؟</a:t>
@@ -16642,6 +16764,7 @@
                   <a:srgbClr val="1B3B6F"/>
                 </a:solidFill>
                 <a:latin typeface="Amiri" pitchFamily="2" charset="-78"/>
+                <a:ea typeface="Amiri" pitchFamily="2" charset="-78"/>
                 <a:cs typeface="Amiri" pitchFamily="2" charset="-78"/>
               </a:rPr>
               <a:t>أَبْقَى … وَأَشْرَبُ …</a:t>
@@ -16718,6 +16841,7 @@
                   <a:srgbClr val="1B3B6F"/>
                 </a:solidFill>
                 <a:latin typeface="Amiri" pitchFamily="2" charset="-78"/>
+                <a:ea typeface="Amiri" pitchFamily="2" charset="-78"/>
                 <a:cs typeface="Amiri" pitchFamily="2" charset="-78"/>
               </a:rPr>
               <a:t>مَاذَا تَفْعَلُ عِنْدَمَا تَكُونُ مَرِيضًا؟</a:t>
@@ -16872,6 +16996,7 @@
                   <a:srgbClr val="1B3B6F"/>
                 </a:solidFill>
                 <a:latin typeface="Amiri" pitchFamily="2" charset="-78"/>
+                <a:ea typeface="Amiri" pitchFamily="2" charset="-78"/>
                 <a:cs typeface="Amiri" pitchFamily="2" charset="-78"/>
               </a:rPr>
               <a:t>عَفْوًا، هَلْ يُمْكِنُ أَنْ تُعِيدَ السُّؤَالَ؟</a:t>
@@ -17005,6 +17130,7 @@
                   <a:srgbClr val="D4AF37"/>
                 </a:solidFill>
                 <a:latin typeface="Amiri" pitchFamily="2" charset="-78"/>
+                <a:ea typeface="Amiri" pitchFamily="2" charset="-78"/>
                 <a:cs typeface="Amiri" pitchFamily="2" charset="-78"/>
               </a:rPr>
               <a:t>م</a:t>
@@ -17325,6 +17451,7 @@
                   <a:srgbClr val="8A6D1E"/>
                 </a:solidFill>
                 <a:latin typeface="Amiri" pitchFamily="2" charset="-78"/>
+                <a:ea typeface="Amiri" pitchFamily="2" charset="-78"/>
                 <a:cs typeface="Amiri" pitchFamily="2" charset="-78"/>
               </a:rPr>
               <a:t>عَادَاتِي الصِّحِّيَّةُ</a:t>
@@ -17605,6 +17732,7 @@
                   <a:srgbClr val="1B3B6F"/>
                 </a:solidFill>
                 <a:latin typeface="Amiri" pitchFamily="2" charset="-78"/>
+                <a:ea typeface="Amiri" pitchFamily="2" charset="-78"/>
                 <a:cs typeface="Amiri" pitchFamily="2" charset="-78"/>
               </a:rPr>
               <a:t>أَوَّلًا … ثُمَّ … وَفِي المَسَاءِ …</a:t>
@@ -17681,6 +17809,7 @@
                   <a:srgbClr val="1B3B6F"/>
                 </a:solidFill>
                 <a:latin typeface="Amiri" pitchFamily="2" charset="-78"/>
+                <a:ea typeface="Amiri" pitchFamily="2" charset="-78"/>
                 <a:cs typeface="Amiri" pitchFamily="2" charset="-78"/>
               </a:rPr>
               <a:t>صِفْ يَوْمَ السَّبْتِ عِنْدَكَ.</a:t>
@@ -17784,6 +17913,7 @@
                   <a:srgbClr val="1B3B6F"/>
                 </a:solidFill>
                 <a:latin typeface="Amiri" pitchFamily="2" charset="-78"/>
+                <a:ea typeface="Amiri" pitchFamily="2" charset="-78"/>
                 <a:cs typeface="Amiri" pitchFamily="2" charset="-78"/>
               </a:rPr>
               <a:t>غَالِبًا … لٰكِنِّي أَحْيَانًا …</a:t>
@@ -17860,6 +17990,7 @@
                   <a:srgbClr val="1B3B6F"/>
                 </a:solidFill>
                 <a:latin typeface="Amiri" pitchFamily="2" charset="-78"/>
+                <a:ea typeface="Amiri" pitchFamily="2" charset="-78"/>
                 <a:cs typeface="Amiri" pitchFamily="2" charset="-78"/>
               </a:rPr>
               <a:t>هَلْ طَعَامُكَ صِحِّيٌّ؟</a:t>
@@ -17963,6 +18094,7 @@
                   <a:srgbClr val="1B3B6F"/>
                 </a:solidFill>
                 <a:latin typeface="Amiri" pitchFamily="2" charset="-78"/>
+                <a:ea typeface="Amiri" pitchFamily="2" charset="-78"/>
                 <a:cs typeface="Amiri" pitchFamily="2" charset="-78"/>
               </a:rPr>
               <a:t>ذَهَبْتُ … ؛ أَكَلْتُ … وَكَانَ …</a:t>
@@ -18039,6 +18171,7 @@
                   <a:srgbClr val="1B3B6F"/>
                 </a:solidFill>
                 <a:latin typeface="Amiri" pitchFamily="2" charset="-78"/>
+                <a:ea typeface="Amiri" pitchFamily="2" charset="-78"/>
                 <a:cs typeface="Amiri" pitchFamily="2" charset="-78"/>
               </a:rPr>
               <a:t>حَدِّثْنِي عَنْ آخِرِ مَرَّةٍ أَكَلْتَ فِيهَا فِي مَطْعَمٍ.</a:t>
@@ -18142,6 +18275,7 @@
                   <a:srgbClr val="1B3B6F"/>
                 </a:solidFill>
                 <a:latin typeface="Amiri" pitchFamily="2" charset="-78"/>
+                <a:ea typeface="Amiri" pitchFamily="2" charset="-78"/>
                 <a:cs typeface="Amiri" pitchFamily="2" charset="-78"/>
               </a:rPr>
               <a:t>كُنْتُ … أَمَّا الآنَ فَآكُلُهَا …</a:t>
@@ -18218,6 +18352,7 @@
                   <a:srgbClr val="1B3B6F"/>
                 </a:solidFill>
                 <a:latin typeface="Amiri" pitchFamily="2" charset="-78"/>
+                <a:ea typeface="Amiri" pitchFamily="2" charset="-78"/>
                 <a:cs typeface="Amiri" pitchFamily="2" charset="-78"/>
               </a:rPr>
               <a:t>كَيْفَ كَانَتْ عَادَاتُكَ عِنْدَمَا كُنْتَ صَغِيرًا؟</a:t>
@@ -18321,6 +18456,7 @@
                   <a:srgbClr val="1B3B6F"/>
                 </a:solidFill>
                 <a:latin typeface="Amiri" pitchFamily="2" charset="-78"/>
+                <a:ea typeface="Amiri" pitchFamily="2" charset="-78"/>
                 <a:cs typeface="Amiri" pitchFamily="2" charset="-78"/>
               </a:rPr>
               <a:t>سَأَنَامُ … لِأَنَّ …</a:t>
@@ -18397,6 +18533,7 @@
                   <a:srgbClr val="1B3B6F"/>
                 </a:solidFill>
                 <a:latin typeface="Amiri" pitchFamily="2" charset="-78"/>
+                <a:ea typeface="Amiri" pitchFamily="2" charset="-78"/>
                 <a:cs typeface="Amiri" pitchFamily="2" charset="-78"/>
               </a:rPr>
               <a:t>مَاذَا سَتُغَيِّرُ فِي حَيَاتِكَ لِتَكُونَ أَكْثَرَ صِحَّةً؟</a:t>
@@ -18606,6 +18743,7 @@
                   <a:srgbClr val="D4AF37"/>
                 </a:solidFill>
                 <a:latin typeface="Amiri" pitchFamily="2" charset="-78"/>
+                <a:ea typeface="Amiri" pitchFamily="2" charset="-78"/>
                 <a:cs typeface="Amiri" pitchFamily="2" charset="-78"/>
               </a:rPr>
               <a:t>م</a:t>
@@ -18926,6 +19064,7 @@
                   <a:srgbClr val="8A6D1E"/>
                 </a:solidFill>
                 <a:latin typeface="Amiri" pitchFamily="2" charset="-78"/>
+                <a:ea typeface="Amiri" pitchFamily="2" charset="-78"/>
                 <a:cs typeface="Amiri" pitchFamily="2" charset="-78"/>
               </a:rPr>
               <a:t>الصِّحَّةُ وَالمُجْتَمَعُ</a:t>
@@ -19206,6 +19345,7 @@
                   <a:srgbClr val="1B3B6F"/>
                 </a:solidFill>
                 <a:latin typeface="Amiri" pitchFamily="2" charset="-78"/>
+                <a:ea typeface="Amiri" pitchFamily="2" charset="-78"/>
                 <a:cs typeface="Amiri" pitchFamily="2" charset="-78"/>
               </a:rPr>
               <a:t>صَحِيحٌ أَنَّ … غَيْرَ أَنَّ …</a:t>
@@ -19282,6 +19422,7 @@
                   <a:srgbClr val="1B3B6F"/>
                 </a:solidFill>
                 <a:latin typeface="Amiri" pitchFamily="2" charset="-78"/>
+                <a:ea typeface="Amiri" pitchFamily="2" charset="-78"/>
                 <a:cs typeface="Amiri" pitchFamily="2" charset="-78"/>
               </a:rPr>
               <a:t>هَلِ الشَّبَابُ اليَوْمَ أَقَلُّ صِحَّةً مِنْ جِيلِ آبَائِهِمْ؟</a:t>
@@ -19385,6 +19526,7 @@
                   <a:srgbClr val="1B3B6F"/>
                 </a:solidFill>
                 <a:latin typeface="Amiri" pitchFamily="2" charset="-78"/>
+                <a:ea typeface="Amiri" pitchFamily="2" charset="-78"/>
                 <a:cs typeface="Amiri" pitchFamily="2" charset="-78"/>
               </a:rPr>
               <a:t>أَرَى أَنَّ المَسْؤُولِيَّةَ … ؛ فَالأُسْرَةُ … وَالمَدْرَسَةُ …</a:t>
@@ -19461,6 +19603,7 @@
                   <a:srgbClr val="1B3B6F"/>
                 </a:solidFill>
                 <a:latin typeface="Amiri" pitchFamily="2" charset="-78"/>
+                <a:ea typeface="Amiri" pitchFamily="2" charset="-78"/>
                 <a:cs typeface="Amiri" pitchFamily="2" charset="-78"/>
               </a:rPr>
               <a:t>مَنِ المَسْؤُولُ عَنْ صِحَّةِ الأَطْفَالِ؟</a:t>
@@ -19564,6 +19707,7 @@
                   <a:srgbClr val="1B3B6F"/>
                 </a:solidFill>
                 <a:latin typeface="Amiri" pitchFamily="2" charset="-78"/>
+                <a:ea typeface="Amiri" pitchFamily="2" charset="-78"/>
                 <a:cs typeface="Amiri" pitchFamily="2" charset="-78"/>
               </a:rPr>
               <a:t>مِنْ نَاحِيَةٍ … وَمِنْ نَاحِيَةٍ أُخْرَى …</a:t>
@@ -19640,6 +19784,7 @@
                   <a:srgbClr val="1B3B6F"/>
                 </a:solidFill>
                 <a:latin typeface="Amiri" pitchFamily="2" charset="-78"/>
+                <a:ea typeface="Amiri" pitchFamily="2" charset="-78"/>
                 <a:cs typeface="Amiri" pitchFamily="2" charset="-78"/>
               </a:rPr>
               <a:t>هَلْ يَجِبُ أَنْ تَكُونَ الوَجَبَاتُ المَدْرَسِيَّةُ مَجَّانِيَّةً؟</a:t>
@@ -19743,6 +19888,7 @@
                   <a:srgbClr val="1B3B6F"/>
                 </a:solidFill>
                 <a:latin typeface="Amiri" pitchFamily="2" charset="-78"/>
+                <a:ea typeface="Amiri" pitchFamily="2" charset="-78"/>
                 <a:cs typeface="Amiri" pitchFamily="2" charset="-78"/>
               </a:rPr>
               <a:t>كَانَ النَّاسُ … أَمَّا اليَوْمَ فَنَطْلُبُ … مِمَّا …</a:t>
@@ -19819,6 +19965,7 @@
                   <a:srgbClr val="1B3B6F"/>
                 </a:solidFill>
                 <a:latin typeface="Amiri" pitchFamily="2" charset="-78"/>
+                <a:ea typeface="Amiri" pitchFamily="2" charset="-78"/>
                 <a:cs typeface="Amiri" pitchFamily="2" charset="-78"/>
               </a:rPr>
               <a:t>كَيْفَ أَثَّرَتِ التِّكْنُولُوجْيَا عَلَى صِحَّتِنَا؟</a:t>
@@ -19922,6 +20069,7 @@
                   <a:srgbClr val="1B3B6F"/>
                 </a:solidFill>
                 <a:latin typeface="Amiri" pitchFamily="2" charset="-78"/>
+                <a:ea typeface="Amiri" pitchFamily="2" charset="-78"/>
                 <a:cs typeface="Amiri" pitchFamily="2" charset="-78"/>
               </a:rPr>
               <a:t>لَوْ فَتَحْتُ مَطْعَمًا، لَقَدَّمْتُ …</a:t>
@@ -19998,6 +20146,7 @@
                   <a:srgbClr val="1B3B6F"/>
                 </a:solidFill>
                 <a:latin typeface="Amiri" pitchFamily="2" charset="-78"/>
+                <a:ea typeface="Amiri" pitchFamily="2" charset="-78"/>
                 <a:cs typeface="Amiri" pitchFamily="2" charset="-78"/>
               </a:rPr>
               <a:t>لَوْ فَتَحْتَ مَطْعَمًا، مَاذَا تُقَدِّمُ فِيهِ؟</a:t>
@@ -20207,6 +20356,7 @@
                   <a:srgbClr val="D4AF37"/>
                 </a:solidFill>
                 <a:latin typeface="Amiri" pitchFamily="2" charset="-78"/>
+                <a:ea typeface="Amiri" pitchFamily="2" charset="-78"/>
                 <a:cs typeface="Amiri" pitchFamily="2" charset="-78"/>
               </a:rPr>
               <a:t>م</a:t>
@@ -20527,6 +20677,7 @@
                   <a:srgbClr val="8A6D1E"/>
                 </a:solidFill>
                 <a:latin typeface="Amiri" pitchFamily="2" charset="-78"/>
+                <a:ea typeface="Amiri" pitchFamily="2" charset="-78"/>
                 <a:cs typeface="Amiri" pitchFamily="2" charset="-78"/>
               </a:rPr>
               <a:t>آدَابُ الصَّفِّ</a:t>
@@ -22058,6 +22209,7 @@
                   <a:srgbClr val="D4AF37"/>
                 </a:solidFill>
                 <a:latin typeface="Amiri" pitchFamily="2" charset="-78"/>
+                <a:ea typeface="Amiri" pitchFamily="2" charset="-78"/>
                 <a:cs typeface="Amiri" pitchFamily="2" charset="-78"/>
               </a:rPr>
               <a:t>م</a:t>
@@ -22378,6 +22530,7 @@
                   <a:srgbClr val="8A6D1E"/>
                 </a:solidFill>
                 <a:latin typeface="Amiri" pitchFamily="2" charset="-78"/>
+                <a:ea typeface="Amiri" pitchFamily="2" charset="-78"/>
                 <a:cs typeface="Amiri" pitchFamily="2" charset="-78"/>
               </a:rPr>
               <a:t>نَمُوذَجُ الإِجَابَةِ</a:t>
@@ -22620,6 +22773,7 @@
                   <a:srgbClr val="1B3B6F"/>
                 </a:solidFill>
                 <a:latin typeface="Amiri" pitchFamily="2" charset="-78"/>
+                <a:ea typeface="Amiri" pitchFamily="2" charset="-78"/>
                 <a:cs typeface="Amiri" pitchFamily="2" charset="-78"/>
               </a:rPr>
               <a:t>أَسْتَيْقِظُ فِي السَّاعَةِ السَّابِعَةِ.</a:t>
@@ -22696,6 +22850,7 @@
                   <a:srgbClr val="1B3B6F"/>
                 </a:solidFill>
                 <a:latin typeface="Amiri" pitchFamily="2" charset="-78"/>
+                <a:ea typeface="Amiri" pitchFamily="2" charset="-78"/>
                 <a:cs typeface="Amiri" pitchFamily="2" charset="-78"/>
               </a:rPr>
               <a:t>مَتَى تَسْتَيْقِظُ؟</a:t>
@@ -22799,6 +22954,7 @@
                   <a:srgbClr val="1B3B6F"/>
                 </a:solidFill>
                 <a:latin typeface="Amiri" pitchFamily="2" charset="-78"/>
+                <a:ea typeface="Amiri" pitchFamily="2" charset="-78"/>
                 <a:cs typeface="Amiri" pitchFamily="2" charset="-78"/>
               </a:rPr>
               <a:t>وَجْبَتِيَ المُفَضَّلَةُ العَشَاءُ، لِأَنَّنَا نَأْكُلُ مَعًا.</a:t>
@@ -22875,6 +23031,7 @@
                   <a:srgbClr val="1B3B6F"/>
                 </a:solidFill>
                 <a:latin typeface="Amiri" pitchFamily="2" charset="-78"/>
+                <a:ea typeface="Amiri" pitchFamily="2" charset="-78"/>
                 <a:cs typeface="Amiri" pitchFamily="2" charset="-78"/>
               </a:rPr>
               <a:t>مَا وَجْبَتُكَ المُفَضَّلَةُ؟</a:t>
@@ -22978,6 +23135,7 @@
                   <a:srgbClr val="1B3B6F"/>
                 </a:solidFill>
                 <a:latin typeface="Amiri" pitchFamily="2" charset="-78"/>
+                <a:ea typeface="Amiri" pitchFamily="2" charset="-78"/>
                 <a:cs typeface="Amiri" pitchFamily="2" charset="-78"/>
               </a:rPr>
               <a:t>أَذْهَبُ مَشْيًا عَلَى الأَقْدَامِ.</a:t>
@@ -23054,6 +23212,7 @@
                   <a:srgbClr val="1B3B6F"/>
                 </a:solidFill>
                 <a:latin typeface="Amiri" pitchFamily="2" charset="-78"/>
+                <a:ea typeface="Amiri" pitchFamily="2" charset="-78"/>
                 <a:cs typeface="Amiri" pitchFamily="2" charset="-78"/>
               </a:rPr>
               <a:t>كَيْفَ تَذْهَبُ إِلَى المَدْرَسَةِ؟</a:t>
@@ -23157,6 +23316,7 @@
                   <a:srgbClr val="1B3B6F"/>
                 </a:solidFill>
                 <a:latin typeface="Amiri" pitchFamily="2" charset="-78"/>
+                <a:ea typeface="Amiri" pitchFamily="2" charset="-78"/>
                 <a:cs typeface="Amiri" pitchFamily="2" charset="-78"/>
               </a:rPr>
               <a:t>نَعَمْ، أَلْعَبُ كُرَةَ القَدَمِ يَوْمَ السَّبْتِ.</a:t>
@@ -23233,6 +23393,7 @@
                   <a:srgbClr val="1B3B6F"/>
                 </a:solidFill>
                 <a:latin typeface="Amiri" pitchFamily="2" charset="-78"/>
+                <a:ea typeface="Amiri" pitchFamily="2" charset="-78"/>
                 <a:cs typeface="Amiri" pitchFamily="2" charset="-78"/>
               </a:rPr>
               <a:t>هَلْ تُمَارِسُ الرِّيَاضَةَ؟</a:t>
@@ -23336,6 +23497,7 @@
                   <a:srgbClr val="1B3B6F"/>
                 </a:solidFill>
                 <a:latin typeface="Amiri" pitchFamily="2" charset="-78"/>
+                <a:ea typeface="Amiri" pitchFamily="2" charset="-78"/>
                 <a:cs typeface="Amiri" pitchFamily="2" charset="-78"/>
               </a:rPr>
               <a:t>أَبْقَى فِي السَّرِيرِ، وَأَشْرَبُ مَاءً كَثِيرًا.</a:t>
@@ -23412,6 +23574,7 @@
                   <a:srgbClr val="1B3B6F"/>
                 </a:solidFill>
                 <a:latin typeface="Amiri" pitchFamily="2" charset="-78"/>
+                <a:ea typeface="Amiri" pitchFamily="2" charset="-78"/>
                 <a:cs typeface="Amiri" pitchFamily="2" charset="-78"/>
               </a:rPr>
               <a:t>مَاذَا تَفْعَلُ عِنْدَمَا تَكُونُ مَرِيضًا؟</a:t>
@@ -23621,6 +23784,7 @@
                   <a:srgbClr val="D4AF37"/>
                 </a:solidFill>
                 <a:latin typeface="Amiri" pitchFamily="2" charset="-78"/>
+                <a:ea typeface="Amiri" pitchFamily="2" charset="-78"/>
                 <a:cs typeface="Amiri" pitchFamily="2" charset="-78"/>
               </a:rPr>
               <a:t>م</a:t>
@@ -23941,6 +24105,7 @@
                   <a:srgbClr val="8A6D1E"/>
                 </a:solidFill>
                 <a:latin typeface="Amiri" pitchFamily="2" charset="-78"/>
+                <a:ea typeface="Amiri" pitchFamily="2" charset="-78"/>
                 <a:cs typeface="Amiri" pitchFamily="2" charset="-78"/>
               </a:rPr>
               <a:t>نَمُوذَجُ الإِجَابَةِ</a:t>
@@ -24183,6 +24348,7 @@
                   <a:srgbClr val="1B3B6F"/>
                 </a:solidFill>
                 <a:latin typeface="Amiri" pitchFamily="2" charset="-78"/>
+                <a:ea typeface="Amiri" pitchFamily="2" charset="-78"/>
                 <a:cs typeface="Amiri" pitchFamily="2" charset="-78"/>
               </a:rPr>
               <a:t>أَوَّلًا أَنَامُ حَتَّى التَّاسِعَةِ، ثُمَّ أَلْعَبُ كُرَةَ القَدَمِ مَعَ أَصْدِقَائِي، وَفِي المَسَاءِ نَزُورُ جَدَّتِي.</a:t>
@@ -24259,6 +24425,7 @@
                   <a:srgbClr val="1B3B6F"/>
                 </a:solidFill>
                 <a:latin typeface="Amiri" pitchFamily="2" charset="-78"/>
+                <a:ea typeface="Amiri" pitchFamily="2" charset="-78"/>
                 <a:cs typeface="Amiri" pitchFamily="2" charset="-78"/>
               </a:rPr>
               <a:t>صِفْ يَوْمَ السَّبْتِ عِنْدَكَ.</a:t>
@@ -24362,6 +24529,7 @@
                   <a:srgbClr val="1B3B6F"/>
                 </a:solidFill>
                 <a:latin typeface="Amiri" pitchFamily="2" charset="-78"/>
+                <a:ea typeface="Amiri" pitchFamily="2" charset="-78"/>
                 <a:cs typeface="Amiri" pitchFamily="2" charset="-78"/>
               </a:rPr>
               <a:t>غَالِبًا نَعَمْ، لِأَنَّ أُمِّي تَطْبُخُ فِي البَيْتِ، لٰكِنِّي أَحْيَانًا آكُلُ البِيتْزَا مَعَ أَصْدِقَائِي.</a:t>
@@ -24438,6 +24606,7 @@
                   <a:srgbClr val="1B3B6F"/>
                 </a:solidFill>
                 <a:latin typeface="Amiri" pitchFamily="2" charset="-78"/>
+                <a:ea typeface="Amiri" pitchFamily="2" charset="-78"/>
                 <a:cs typeface="Amiri" pitchFamily="2" charset="-78"/>
               </a:rPr>
               <a:t>هَلْ طَعَامُكَ صِحِّيٌّ؟</a:t>
@@ -24541,6 +24710,7 @@
                   <a:srgbClr val="1B3B6F"/>
                 </a:solidFill>
                 <a:latin typeface="Amiri" pitchFamily="2" charset="-78"/>
+                <a:ea typeface="Amiri" pitchFamily="2" charset="-78"/>
                 <a:cs typeface="Amiri" pitchFamily="2" charset="-78"/>
               </a:rPr>
               <a:t>ذَهَبْتُ إِلَى مَطْعَمٍ لُبْنَانِيٍّ فِي عِيدِ مِيلَادِ أُمِّي؛ أَكَلْتُ المَشَاوِيَ، وَكَانَ الطَّعَامُ لَذِيذًا لٰكِنَّهُ غَالٍ.</a:t>
@@ -24617,6 +24787,7 @@
                   <a:srgbClr val="1B3B6F"/>
                 </a:solidFill>
                 <a:latin typeface="Amiri" pitchFamily="2" charset="-78"/>
+                <a:ea typeface="Amiri" pitchFamily="2" charset="-78"/>
                 <a:cs typeface="Amiri" pitchFamily="2" charset="-78"/>
               </a:rPr>
               <a:t>حَدِّثْنِي عَنْ آخِرِ مَرَّةٍ أَكَلْتَ فِيهَا فِي مَطْعَمٍ.</a:t>
@@ -24720,6 +24891,7 @@
                   <a:srgbClr val="1B3B6F"/>
                 </a:solidFill>
                 <a:latin typeface="Amiri" pitchFamily="2" charset="-78"/>
+                <a:ea typeface="Amiri" pitchFamily="2" charset="-78"/>
                 <a:cs typeface="Amiri" pitchFamily="2" charset="-78"/>
               </a:rPr>
               <a:t>كُنْتُ آكُلُ الحَلَوِيَّاتِ كُلَّ يَوْمٍ، أَمَّا الآنَ فَآكُلُهَا فِي نِهَايَةِ الأُسْبُوعِ فَقَطْ.</a:t>
@@ -24796,6 +24968,7 @@
                   <a:srgbClr val="1B3B6F"/>
                 </a:solidFill>
                 <a:latin typeface="Amiri" pitchFamily="2" charset="-78"/>
+                <a:ea typeface="Amiri" pitchFamily="2" charset="-78"/>
                 <a:cs typeface="Amiri" pitchFamily="2" charset="-78"/>
               </a:rPr>
               <a:t>كَيْفَ كَانَتْ عَادَاتُكَ عِنْدَمَا كُنْتَ صَغِيرًا؟</a:t>
@@ -24899,6 +25072,7 @@
                   <a:srgbClr val="1B3B6F"/>
                 </a:solidFill>
                 <a:latin typeface="Amiri" pitchFamily="2" charset="-78"/>
+                <a:ea typeface="Amiri" pitchFamily="2" charset="-78"/>
                 <a:cs typeface="Amiri" pitchFamily="2" charset="-78"/>
               </a:rPr>
               <a:t>سَأَنَامُ مُبَكِّرًا، وَسَأَتْرُكُ الهَاتِفَ خَارِجَ غُرْفَتِي، لِأَنَّ النَّوْمَ الجَيِّدَ يُسَاعِدُنِي فِي الامْتِحَانَاتِ.</a:t>
@@ -24975,6 +25149,7 @@
                   <a:srgbClr val="1B3B6F"/>
                 </a:solidFill>
                 <a:latin typeface="Amiri" pitchFamily="2" charset="-78"/>
+                <a:ea typeface="Amiri" pitchFamily="2" charset="-78"/>
                 <a:cs typeface="Amiri" pitchFamily="2" charset="-78"/>
               </a:rPr>
               <a:t>مَاذَا سَتُغَيِّرُ فِي حَيَاتِكَ لِتَكُونَ أَكْثَرَ صِحَّةً؟</a:t>
@@ -25184,6 +25359,7 @@
                   <a:srgbClr val="D4AF37"/>
                 </a:solidFill>
                 <a:latin typeface="Amiri" pitchFamily="2" charset="-78"/>
+                <a:ea typeface="Amiri" pitchFamily="2" charset="-78"/>
                 <a:cs typeface="Amiri" pitchFamily="2" charset="-78"/>
               </a:rPr>
               <a:t>م</a:t>
@@ -25504,6 +25680,7 @@
                   <a:srgbClr val="8A6D1E"/>
                 </a:solidFill>
                 <a:latin typeface="Amiri" pitchFamily="2" charset="-78"/>
+                <a:ea typeface="Amiri" pitchFamily="2" charset="-78"/>
                 <a:cs typeface="Amiri" pitchFamily="2" charset="-78"/>
               </a:rPr>
               <a:t>نَمُوذَجُ الإِجَابَةِ</a:t>
@@ -25746,6 +25923,7 @@
                   <a:srgbClr val="1B3B6F"/>
                 </a:solidFill>
                 <a:latin typeface="Amiri" pitchFamily="2" charset="-78"/>
+                <a:ea typeface="Amiri" pitchFamily="2" charset="-78"/>
                 <a:cs typeface="Amiri" pitchFamily="2" charset="-78"/>
               </a:rPr>
               <a:t>صَحِيحٌ أَنَّهُمْ يَجْلِسُونَ أَكْثَرَ أَمَامَ الشَّاشَاتِ، غَيْرَ أَنَّهُمْ يَعْرِفُونَ عَنِ التَّغْذِيَةِ أَكْثَرَ مِنْ أَيِّ جِيلٍ سَابِقٍ.</a:t>
@@ -25822,6 +26000,7 @@
                   <a:srgbClr val="1B3B6F"/>
                 </a:solidFill>
                 <a:latin typeface="Amiri" pitchFamily="2" charset="-78"/>
+                <a:ea typeface="Amiri" pitchFamily="2" charset="-78"/>
                 <a:cs typeface="Amiri" pitchFamily="2" charset="-78"/>
               </a:rPr>
               <a:t>هَلِ الشَّبَابُ اليَوْمَ أَقَلُّ صِحَّةً مِنْ جِيلِ آبَائِهِمْ؟</a:t>
@@ -25925,6 +26104,7 @@
                   <a:srgbClr val="1B3B6F"/>
                 </a:solidFill>
                 <a:latin typeface="Amiri" pitchFamily="2" charset="-78"/>
+                <a:ea typeface="Amiri" pitchFamily="2" charset="-78"/>
                 <a:cs typeface="Amiri" pitchFamily="2" charset="-78"/>
               </a:rPr>
               <a:t>أَرَى أَنَّ المَسْؤُولِيَّةَ مُشْتَرَكَةٌ؛ فَالأُسْرَةُ تَطْبُخُ، وَالمَدْرَسَةُ تُعَلِّمُ، وَالحُكُومَةُ تَمْنَعُ الإِعْلَانَاتِ المُضَلِّلَةَ.</a:t>
@@ -26001,6 +26181,7 @@
                   <a:srgbClr val="1B3B6F"/>
                 </a:solidFill>
                 <a:latin typeface="Amiri" pitchFamily="2" charset="-78"/>
+                <a:ea typeface="Amiri" pitchFamily="2" charset="-78"/>
                 <a:cs typeface="Amiri" pitchFamily="2" charset="-78"/>
               </a:rPr>
               <a:t>مَنِ المَسْؤُولُ عَنْ صِحَّةِ الأَطْفَالِ؟</a:t>
@@ -26104,6 +26285,7 @@
                   <a:srgbClr val="1B3B6F"/>
                 </a:solidFill>
                 <a:latin typeface="Amiri" pitchFamily="2" charset="-78"/>
+                <a:ea typeface="Amiri" pitchFamily="2" charset="-78"/>
                 <a:cs typeface="Amiri" pitchFamily="2" charset="-78"/>
               </a:rPr>
               <a:t>مِنْ نَاحِيَةٍ، تُكَلِّفُ الدَّوْلَةَ كَثِيرًا، وَمِنْ نَاحِيَةٍ أُخْرَى، الطِّفْلُ الجَائِعُ لَا يَتَعَلَّمُ؛ لِذٰلِكَ أُؤَيِّدُهَا لِلْجَمِيعِ.</a:t>
@@ -26180,6 +26362,7 @@
                   <a:srgbClr val="1B3B6F"/>
                 </a:solidFill>
                 <a:latin typeface="Amiri" pitchFamily="2" charset="-78"/>
+                <a:ea typeface="Amiri" pitchFamily="2" charset="-78"/>
                 <a:cs typeface="Amiri" pitchFamily="2" charset="-78"/>
               </a:rPr>
               <a:t>هَلْ يَجِبُ أَنْ تَكُونَ الوَجَبَاتُ المَدْرَسِيَّةُ مَجَّانِيَّةً؟</a:t>
@@ -26389,6 +26572,7 @@
                   <a:srgbClr val="D4AF37"/>
                 </a:solidFill>
                 <a:latin typeface="Amiri" pitchFamily="2" charset="-78"/>
+                <a:ea typeface="Amiri" pitchFamily="2" charset="-78"/>
                 <a:cs typeface="Amiri" pitchFamily="2" charset="-78"/>
               </a:rPr>
               <a:t>م</a:t>
@@ -26709,6 +26893,7 @@
                   <a:srgbClr val="8A6D1E"/>
                 </a:solidFill>
                 <a:latin typeface="Amiri" pitchFamily="2" charset="-78"/>
+                <a:ea typeface="Amiri" pitchFamily="2" charset="-78"/>
                 <a:cs typeface="Amiri" pitchFamily="2" charset="-78"/>
               </a:rPr>
               <a:t>نَمُوذَجُ الإِجَابَةِ</a:t>
@@ -26951,6 +27136,7 @@
                   <a:srgbClr val="1B3B6F"/>
                 </a:solidFill>
                 <a:latin typeface="Amiri" pitchFamily="2" charset="-78"/>
+                <a:ea typeface="Amiri" pitchFamily="2" charset="-78"/>
                 <a:cs typeface="Amiri" pitchFamily="2" charset="-78"/>
               </a:rPr>
               <a:t>كَانَ النَّاسُ يَمْشُونَ أَكْثَرَ، أَمَّا اليَوْمَ فَنَطْلُبُ كُلَّ شَيْءٍ بِالهَاتِفِ، مِمَّا يُقَلِّلُ حَرَكَتَنَا؛ وَمَعَ ذٰلِكَ تُسَاعِدُنَا التَّطْبِيقَاتُ عَلَى عَدِّ خُطُوَاتِنَا.</a:t>
@@ -27027,6 +27213,7 @@
                   <a:srgbClr val="1B3B6F"/>
                 </a:solidFill>
                 <a:latin typeface="Amiri" pitchFamily="2" charset="-78"/>
+                <a:ea typeface="Amiri" pitchFamily="2" charset="-78"/>
                 <a:cs typeface="Amiri" pitchFamily="2" charset="-78"/>
               </a:rPr>
               <a:t>كَيْفَ أَثَّرَتِ التِّكْنُولُوجْيَا عَلَى صِحَّتِنَا؟</a:t>
@@ -27130,6 +27317,7 @@
                   <a:srgbClr val="1B3B6F"/>
                 </a:solidFill>
                 <a:latin typeface="Amiri" pitchFamily="2" charset="-78"/>
+                <a:ea typeface="Amiri" pitchFamily="2" charset="-78"/>
                 <a:cs typeface="Amiri" pitchFamily="2" charset="-78"/>
               </a:rPr>
               <a:t>لَوْ فَتَحْتُ مَطْعَمًا، لَقَدَّمْتُ أَطْبَاقًا عَرَبِيَّةً صِحِّيَّةً، كَالعَدَسِ وَالسَّلَطَاتِ، وَلَجَعَلْتُ الأَسْعَارَ مُنَاسِبَةً لِلطُّلَّابِ.</a:t>
@@ -27206,6 +27394,7 @@
                   <a:srgbClr val="1B3B6F"/>
                 </a:solidFill>
                 <a:latin typeface="Amiri" pitchFamily="2" charset="-78"/>
+                <a:ea typeface="Amiri" pitchFamily="2" charset="-78"/>
                 <a:cs typeface="Amiri" pitchFamily="2" charset="-78"/>
               </a:rPr>
               <a:t>لَوْ فَتَحْتَ مَطْعَمًا، مَاذَا تُقَدِّمُ فِيهِ؟</a:t>
@@ -27415,6 +27604,7 @@
                   <a:srgbClr val="D4AF37"/>
                 </a:solidFill>
                 <a:latin typeface="Amiri" pitchFamily="2" charset="-78"/>
+                <a:ea typeface="Amiri" pitchFamily="2" charset="-78"/>
                 <a:cs typeface="Amiri" pitchFamily="2" charset="-78"/>
               </a:rPr>
               <a:t>م</a:t>
@@ -27735,6 +27925,7 @@
                   <a:srgbClr val="8A6D1E"/>
                 </a:solidFill>
                 <a:latin typeface="Amiri" pitchFamily="2" charset="-78"/>
+                <a:ea typeface="Amiri" pitchFamily="2" charset="-78"/>
                 <a:cs typeface="Amiri" pitchFamily="2" charset="-78"/>
               </a:rPr>
               <a:t>قَيِّمْ عَمَلَكَ</a:t>
@@ -28979,6 +29170,7 @@
                   <a:srgbClr val="FFFFFF"/>
                 </a:solidFill>
                 <a:latin typeface="Amiri" pitchFamily="2" charset="-78"/>
+                <a:ea typeface="Amiri" pitchFamily="2" charset="-78"/>
                 <a:cs typeface="Amiri" pitchFamily="2" charset="-78"/>
               </a:rPr>
               <a:t>أَحْسَنْتُمْ! إِلَى اللِّقَاءِ</a:t>
@@ -29131,6 +29323,7 @@
                   <a:srgbClr val="D4AF37"/>
                 </a:solidFill>
                 <a:latin typeface="Amiri" pitchFamily="2" charset="-78"/>
+                <a:ea typeface="Amiri" pitchFamily="2" charset="-78"/>
                 <a:cs typeface="Amiri" pitchFamily="2" charset="-78"/>
               </a:rPr>
               <a:t>وَرْشَةُ الكِتَابَةِ</a:t>
@@ -29264,6 +29457,7 @@
                   <a:srgbClr val="D4AF37"/>
                 </a:solidFill>
                 <a:latin typeface="Amiri" pitchFamily="2" charset="-78"/>
+                <a:ea typeface="Amiri" pitchFamily="2" charset="-78"/>
                 <a:cs typeface="Amiri" pitchFamily="2" charset="-78"/>
               </a:rPr>
               <a:t>م</a:t>
@@ -29584,6 +29778,7 @@
                   <a:srgbClr val="8A6D1E"/>
                 </a:solidFill>
                 <a:latin typeface="Amiri" pitchFamily="2" charset="-78"/>
+                <a:ea typeface="Amiri" pitchFamily="2" charset="-78"/>
                 <a:cs typeface="Amiri" pitchFamily="2" charset="-78"/>
               </a:rPr>
               <a:t>خَرِيطَةُ الوَرْشَةِ</a:t>
@@ -29898,6 +30093,7 @@
                   <a:srgbClr val="1B3B6F"/>
                 </a:solidFill>
                 <a:latin typeface="Amiri" pitchFamily="2" charset="-78"/>
+                <a:ea typeface="Amiri" pitchFamily="2" charset="-78"/>
                 <a:cs typeface="Amiri" pitchFamily="2" charset="-78"/>
               </a:rPr>
               <a:t>كَيْفَ</a:t>
@@ -30174,6 +30370,7 @@
                   <a:srgbClr val="1E6B52"/>
                 </a:solidFill>
                 <a:latin typeface="Amiri" pitchFamily="2" charset="-78"/>
+                <a:ea typeface="Amiri" pitchFamily="2" charset="-78"/>
                 <a:cs typeface="Amiri" pitchFamily="2" charset="-78"/>
               </a:rPr>
               <a:t>تَمْثِيلُ الدَّوْرِ</a:t>
@@ -30450,6 +30647,7 @@
                   <a:srgbClr val="8A6D1E"/>
                 </a:solidFill>
                 <a:latin typeface="Amiri" pitchFamily="2" charset="-78"/>
+                <a:ea typeface="Amiri" pitchFamily="2" charset="-78"/>
                 <a:cs typeface="Amiri" pitchFamily="2" charset="-78"/>
               </a:rPr>
               <a:t>النَّمُوذَجُ</a:t>
@@ -30726,6 +30924,7 @@
                   <a:srgbClr val="1E6B52"/>
                 </a:solidFill>
                 <a:latin typeface="Amiri" pitchFamily="2" charset="-78"/>
+                <a:ea typeface="Amiri" pitchFamily="2" charset="-78"/>
                 <a:cs typeface="Amiri" pitchFamily="2" charset="-78"/>
               </a:rPr>
               <a:t>المُحَادَثَةُ</a:t>
@@ -31002,6 +31201,7 @@
                   <a:srgbClr val="8A6D1E"/>
                 </a:solidFill>
                 <a:latin typeface="Amiri" pitchFamily="2" charset="-78"/>
+                <a:ea typeface="Amiri" pitchFamily="2" charset="-78"/>
                 <a:cs typeface="Amiri" pitchFamily="2" charset="-78"/>
               </a:rPr>
               <a:t>قَيِّمْ</a:t>
@@ -31245,6 +31445,7 @@
                   <a:srgbClr val="D4AF37"/>
                 </a:solidFill>
                 <a:latin typeface="Amiri" pitchFamily="2" charset="-78"/>
+                <a:ea typeface="Amiri" pitchFamily="2" charset="-78"/>
                 <a:cs typeface="Amiri" pitchFamily="2" charset="-78"/>
               </a:rPr>
               <a:t>م</a:t>
@@ -31565,6 +31766,7 @@
                   <a:srgbClr val="8A6D1E"/>
                 </a:solidFill>
                 <a:latin typeface="Amiri" pitchFamily="2" charset="-78"/>
+                <a:ea typeface="Amiri" pitchFamily="2" charset="-78"/>
                 <a:cs typeface="Amiri" pitchFamily="2" charset="-78"/>
               </a:rPr>
               <a:t>امْتِحَانُ التَّحَدُّثِ</a:t>
@@ -32189,6 +32391,7 @@
                   <a:srgbClr val="1B3B6F"/>
                 </a:solidFill>
                 <a:latin typeface="Amiri" pitchFamily="2" charset="-78"/>
+                <a:ea typeface="Amiri" pitchFamily="2" charset="-78"/>
                 <a:cs typeface="Amiri" pitchFamily="2" charset="-78"/>
               </a:rPr>
               <a:t>عَفْوًا، هَلْ يُمْكِنُ أَنْ تُعِيدَ السُّؤَالَ؟</a:t>
@@ -32288,6 +32491,7 @@
                   <a:srgbClr val="1B3B6F"/>
                 </a:solidFill>
                 <a:latin typeface="Amiri" pitchFamily="2" charset="-78"/>
+                <a:ea typeface="Amiri" pitchFamily="2" charset="-78"/>
                 <a:cs typeface="Amiri" pitchFamily="2" charset="-78"/>
               </a:rPr>
               <a:t>لَحْظَةً، دَعْنِي أُفَكِّرُ …</a:t>
@@ -32387,6 +32591,7 @@
                   <a:srgbClr val="1B3B6F"/>
                 </a:solidFill>
                 <a:latin typeface="Amiri" pitchFamily="2" charset="-78"/>
+                <a:ea typeface="Amiri" pitchFamily="2" charset="-78"/>
                 <a:cs typeface="Amiri" pitchFamily="2" charset="-78"/>
               </a:rPr>
               <a:t>أَقْصِدُ …</a:t>
@@ -32558,6 +32763,7 @@
                   <a:srgbClr val="D4AF37"/>
                 </a:solidFill>
                 <a:latin typeface="Amiri" pitchFamily="2" charset="-78"/>
+                <a:ea typeface="Amiri" pitchFamily="2" charset="-78"/>
                 <a:cs typeface="Amiri" pitchFamily="2" charset="-78"/>
               </a:rPr>
               <a:t>م</a:t>
@@ -32878,6 +33084,7 @@
                   <a:srgbClr val="8A6D1E"/>
                 </a:solidFill>
                 <a:latin typeface="Amiri" pitchFamily="2" charset="-78"/>
+                <a:ea typeface="Amiri" pitchFamily="2" charset="-78"/>
                 <a:cs typeface="Amiri" pitchFamily="2" charset="-78"/>
               </a:rPr>
               <a:t>المِحْوَرُ الأَوَّلُ فِي اثْنَتَيْ عَشْرَةَ بِنْيَةً</a:t>
@@ -33181,6 +33388,7 @@
                   <a:srgbClr val="1B3B6F"/>
                 </a:solidFill>
                 <a:latin typeface="Amiri" pitchFamily="2" charset="-78"/>
+                <a:ea typeface="Amiri" pitchFamily="2" charset="-78"/>
                 <a:cs typeface="Amiri" pitchFamily="2" charset="-78"/>
               </a:rPr>
               <a:t>أَسْتَيْقِظُ فِي السَّاعَةِ …</a:t>
@@ -33338,6 +33546,7 @@
                   <a:srgbClr val="1B3B6F"/>
                 </a:solidFill>
                 <a:latin typeface="Amiri" pitchFamily="2" charset="-78"/>
+                <a:ea typeface="Amiri" pitchFamily="2" charset="-78"/>
                 <a:cs typeface="Amiri" pitchFamily="2" charset="-78"/>
               </a:rPr>
               <a:t>وَالرُّبْعِ</a:t>
@@ -33441,6 +33650,7 @@
                   <a:srgbClr val="1B3B6F"/>
                 </a:solidFill>
                 <a:latin typeface="Amiri" pitchFamily="2" charset="-78"/>
+                <a:ea typeface="Amiri" pitchFamily="2" charset="-78"/>
                 <a:cs typeface="Amiri" pitchFamily="2" charset="-78"/>
               </a:rPr>
               <a:t>وَالنِّصْفِ</a:t>
@@ -33706,6 +33916,7 @@
                   <a:srgbClr val="1B3B6F"/>
                 </a:solidFill>
                 <a:latin typeface="Amiri" pitchFamily="2" charset="-78"/>
+                <a:ea typeface="Amiri" pitchFamily="2" charset="-78"/>
                 <a:cs typeface="Amiri" pitchFamily="2" charset="-78"/>
               </a:rPr>
               <a:t>دَائِمًا · أَحْيَانًا · أَبَدًا</a:t>
@@ -33863,6 +34074,7 @@
                   <a:srgbClr val="1B3B6F"/>
                 </a:solidFill>
                 <a:latin typeface="Amiri" pitchFamily="2" charset="-78"/>
+                <a:ea typeface="Amiri" pitchFamily="2" charset="-78"/>
                 <a:cs typeface="Amiri" pitchFamily="2" charset="-78"/>
               </a:rPr>
               <a:t>مَرَّتَيْنِ فِي الأُسْبُوعِ</a:t>
@@ -33966,6 +34178,7 @@
                   <a:srgbClr val="1B3B6F"/>
                 </a:solidFill>
                 <a:latin typeface="Amiri" pitchFamily="2" charset="-78"/>
+                <a:ea typeface="Amiri" pitchFamily="2" charset="-78"/>
                 <a:cs typeface="Amiri" pitchFamily="2" charset="-78"/>
               </a:rPr>
               <a:t>عَادَةً</a:t>
@@ -34231,6 +34444,7 @@
                   <a:srgbClr val="1B3B6F"/>
                 </a:solidFill>
                 <a:latin typeface="Amiri" pitchFamily="2" charset="-78"/>
+                <a:ea typeface="Amiri" pitchFamily="2" charset="-78"/>
                 <a:cs typeface="Amiri" pitchFamily="2" charset="-78"/>
               </a:rPr>
               <a:t>أَوَّلًا · ثُمَّ · بَعْدَ ذٰلِكَ</a:t>
@@ -34388,6 +34602,7 @@
                   <a:srgbClr val="1B3B6F"/>
                 </a:solidFill>
                 <a:latin typeface="Amiri" pitchFamily="2" charset="-78"/>
+                <a:ea typeface="Amiri" pitchFamily="2" charset="-78"/>
                 <a:cs typeface="Amiri" pitchFamily="2" charset="-78"/>
               </a:rPr>
               <a:t>أَخِيرًا</a:t>
@@ -34491,6 +34706,7 @@
                   <a:srgbClr val="1B3B6F"/>
                 </a:solidFill>
                 <a:latin typeface="Amiri" pitchFamily="2" charset="-78"/>
+                <a:ea typeface="Amiri" pitchFamily="2" charset="-78"/>
                 <a:cs typeface="Amiri" pitchFamily="2" charset="-78"/>
               </a:rPr>
               <a:t>قَبْلَ</a:t>
@@ -34756,6 +34972,7 @@
                   <a:srgbClr val="1B3B6F"/>
                 </a:solidFill>
                 <a:latin typeface="Amiri" pitchFamily="2" charset="-78"/>
+                <a:ea typeface="Amiri" pitchFamily="2" charset="-78"/>
                 <a:cs typeface="Amiri" pitchFamily="2" charset="-78"/>
               </a:rPr>
               <a:t>الفُطُورُ · الغَدَاءُ · العَشَاءُ</a:t>
@@ -34913,6 +35130,7 @@
                   <a:srgbClr val="1B3B6F"/>
                 </a:solidFill>
                 <a:latin typeface="Amiri" pitchFamily="2" charset="-78"/>
+                <a:ea typeface="Amiri" pitchFamily="2" charset="-78"/>
                 <a:cs typeface="Amiri" pitchFamily="2" charset="-78"/>
               </a:rPr>
               <a:t>لَا أُحِبُّ أَبَدًا</a:t>
@@ -35016,6 +35234,7 @@
                   <a:srgbClr val="1B3B6F"/>
                 </a:solidFill>
                 <a:latin typeface="Amiri" pitchFamily="2" charset="-78"/>
+                <a:ea typeface="Amiri" pitchFamily="2" charset="-78"/>
                 <a:cs typeface="Amiri" pitchFamily="2" charset="-78"/>
               </a:rPr>
               <a:t>أُفَضِّلُ</a:t>
@@ -35281,6 +35500,7 @@
                   <a:srgbClr val="1B3B6F"/>
                 </a:solidFill>
                 <a:latin typeface="Amiri" pitchFamily="2" charset="-78"/>
+                <a:ea typeface="Amiri" pitchFamily="2" charset="-78"/>
                 <a:cs typeface="Amiri" pitchFamily="2" charset="-78"/>
               </a:rPr>
               <a:t>أُرِيدُ … مِنْ فَضْلِكَ</a:t>
@@ -35438,6 +35658,7 @@
                   <a:srgbClr val="1B3B6F"/>
                 </a:solidFill>
                 <a:latin typeface="Amiri" pitchFamily="2" charset="-78"/>
+                <a:ea typeface="Amiri" pitchFamily="2" charset="-78"/>
                 <a:cs typeface="Amiri" pitchFamily="2" charset="-78"/>
               </a:rPr>
               <a:t>الحِسَابُ</a:t>
@@ -35541,6 +35762,7 @@
                   <a:srgbClr val="1B3B6F"/>
                 </a:solidFill>
                 <a:latin typeface="Amiri" pitchFamily="2" charset="-78"/>
+                <a:ea typeface="Amiri" pitchFamily="2" charset="-78"/>
                 <a:cs typeface="Amiri" pitchFamily="2" charset="-78"/>
               </a:rPr>
               <a:t>كَمِ الثَّمَنُ؟</a:t>
@@ -35806,6 +36028,7 @@
                   <a:srgbClr val="1B3B6F"/>
                 </a:solidFill>
                 <a:latin typeface="Amiri" pitchFamily="2" charset="-78"/>
+                <a:ea typeface="Amiri" pitchFamily="2" charset="-78"/>
                 <a:cs typeface="Amiri" pitchFamily="2" charset="-78"/>
               </a:rPr>
               <a:t>صِحِّيٌّ · غَيْرُ صِحِّيٍّ</a:t>
@@ -35963,6 +36186,7 @@
                   <a:srgbClr val="1B3B6F"/>
                 </a:solidFill>
                 <a:latin typeface="Amiri" pitchFamily="2" charset="-78"/>
+                <a:ea typeface="Amiri" pitchFamily="2" charset="-78"/>
                 <a:cs typeface="Amiri" pitchFamily="2" charset="-78"/>
               </a:rPr>
               <a:t>أَكْثَرُ صِحَّةً</a:t>
@@ -36066,6 +36290,7 @@
                   <a:srgbClr val="1B3B6F"/>
                 </a:solidFill>
                 <a:latin typeface="Amiri" pitchFamily="2" charset="-78"/>
+                <a:ea typeface="Amiri" pitchFamily="2" charset="-78"/>
                 <a:cs typeface="Amiri" pitchFamily="2" charset="-78"/>
               </a:rPr>
               <a:t>صِحِّيَّةٌ · غَيْرُ صِحِّيَّةٍ</a:t>
@@ -36199,6 +36424,7 @@
                   <a:srgbClr val="D4AF37"/>
                 </a:solidFill>
                 <a:latin typeface="Amiri" pitchFamily="2" charset="-78"/>
+                <a:ea typeface="Amiri" pitchFamily="2" charset="-78"/>
                 <a:cs typeface="Amiri" pitchFamily="2" charset="-78"/>
               </a:rPr>
               <a:t>م</a:t>
@@ -36519,6 +36745,7 @@
                   <a:srgbClr val="8A6D1E"/>
                 </a:solidFill>
                 <a:latin typeface="Amiri" pitchFamily="2" charset="-78"/>
+                <a:ea typeface="Amiri" pitchFamily="2" charset="-78"/>
                 <a:cs typeface="Amiri" pitchFamily="2" charset="-78"/>
               </a:rPr>
               <a:t>بِنْيَاتٌ تَرْفَعُ الدَّرَجَةَ</a:t>
@@ -36822,6 +37049,7 @@
                   <a:srgbClr val="1B3B6F"/>
                 </a:solidFill>
                 <a:latin typeface="Amiri" pitchFamily="2" charset="-78"/>
+                <a:ea typeface="Amiri" pitchFamily="2" charset="-78"/>
                 <a:cs typeface="Amiri" pitchFamily="2" charset="-78"/>
               </a:rPr>
               <a:t>يُؤْلِمُنِي … · عِنْدِي …</a:t>
@@ -36979,6 +37207,7 @@
                   <a:srgbClr val="1B3B6F"/>
                 </a:solidFill>
                 <a:latin typeface="Amiri" pitchFamily="2" charset="-78"/>
+                <a:ea typeface="Amiri" pitchFamily="2" charset="-78"/>
                 <a:cs typeface="Amiri" pitchFamily="2" charset="-78"/>
               </a:rPr>
               <a:t>حَرَارَةٌ</a:t>
@@ -37082,6 +37311,7 @@
                   <a:srgbClr val="1B3B6F"/>
                 </a:solidFill>
                 <a:latin typeface="Amiri" pitchFamily="2" charset="-78"/>
+                <a:ea typeface="Amiri" pitchFamily="2" charset="-78"/>
                 <a:cs typeface="Amiri" pitchFamily="2" charset="-78"/>
               </a:rPr>
               <a:t>يُؤْلِمُنِي رَأْسِي</a:t>
@@ -37347,6 +37577,7 @@
                   <a:srgbClr val="1B3B6F"/>
                 </a:solidFill>
                 <a:latin typeface="Amiri" pitchFamily="2" charset="-78"/>
+                <a:ea typeface="Amiri" pitchFamily="2" charset="-78"/>
                 <a:cs typeface="Amiri" pitchFamily="2" charset="-78"/>
               </a:rPr>
               <a:t>مُنْذُ يَوْمَيْنِ</a:t>
@@ -37504,6 +37735,7 @@
                   <a:srgbClr val="1B3B6F"/>
                 </a:solidFill>
                 <a:latin typeface="Amiri" pitchFamily="2" charset="-78"/>
+                <a:ea typeface="Amiri" pitchFamily="2" charset="-78"/>
                 <a:cs typeface="Amiri" pitchFamily="2" charset="-78"/>
               </a:rPr>
               <a:t>مُنْذُ أُسْبُوعٍ</a:t>
@@ -37607,6 +37839,7 @@
                   <a:srgbClr val="1B3B6F"/>
                 </a:solidFill>
                 <a:latin typeface="Amiri" pitchFamily="2" charset="-78"/>
+                <a:ea typeface="Amiri" pitchFamily="2" charset="-78"/>
                 <a:cs typeface="Amiri" pitchFamily="2" charset="-78"/>
               </a:rPr>
               <a:t>مُنْذُ أَمْسِ</a:t>
@@ -37872,6 +38105,7 @@
                   <a:srgbClr val="1B3B6F"/>
                 </a:solidFill>
                 <a:latin typeface="Amiri" pitchFamily="2" charset="-78"/>
+                <a:ea typeface="Amiri" pitchFamily="2" charset="-78"/>
                 <a:cs typeface="Amiri" pitchFamily="2" charset="-78"/>
               </a:rPr>
               <a:t>خُذْ … · لَا تَأْكُلْ …</a:t>
@@ -38029,6 +38263,7 @@
                   <a:srgbClr val="1B3B6F"/>
                 </a:solidFill>
                 <a:latin typeface="Amiri" pitchFamily="2" charset="-78"/>
+                <a:ea typeface="Amiri" pitchFamily="2" charset="-78"/>
                 <a:cs typeface="Amiri" pitchFamily="2" charset="-78"/>
               </a:rPr>
               <a:t>يَجِبُ أَنْ</a:t>
@@ -38132,6 +38367,7 @@
                   <a:srgbClr val="1B3B6F"/>
                 </a:solidFill>
                 <a:latin typeface="Amiri" pitchFamily="2" charset="-78"/>
+                <a:ea typeface="Amiri" pitchFamily="2" charset="-78"/>
                 <a:cs typeface="Amiri" pitchFamily="2" charset="-78"/>
               </a:rPr>
               <a:t>خُذِي · لَا تَأْكُلِي</a:t>
@@ -38397,6 +38633,7 @@
                   <a:srgbClr val="1B3B6F"/>
                 </a:solidFill>
                 <a:latin typeface="Amiri" pitchFamily="2" charset="-78"/>
+                <a:ea typeface="Amiri" pitchFamily="2" charset="-78"/>
                 <a:cs typeface="Amiri" pitchFamily="2" charset="-78"/>
               </a:rPr>
               <a:t>أَذْهَبُ إِلَى المَدْرَسَةِ بِالحَافِلَةِ</a:t>
@@ -38554,6 +38791,7 @@
                   <a:srgbClr val="1B3B6F"/>
                 </a:solidFill>
                 <a:latin typeface="Amiri" pitchFamily="2" charset="-78"/>
+                <a:ea typeface="Amiri" pitchFamily="2" charset="-78"/>
                 <a:cs typeface="Amiri" pitchFamily="2" charset="-78"/>
               </a:rPr>
               <a:t>تَسْتَغْرِقُ الرِّحْلَةُ</a:t>
@@ -38657,6 +38895,7 @@
                   <a:srgbClr val="1B3B6F"/>
                 </a:solidFill>
                 <a:latin typeface="Amiri" pitchFamily="2" charset="-78"/>
+                <a:ea typeface="Amiri" pitchFamily="2" charset="-78"/>
                 <a:cs typeface="Amiri" pitchFamily="2" charset="-78"/>
               </a:rPr>
               <a:t>مَشْيًا عَلَى الأَقْدَامِ</a:t>
@@ -38922,6 +39161,7 @@
                   <a:srgbClr val="1B3B6F"/>
                 </a:solidFill>
                 <a:latin typeface="Amiri" pitchFamily="2" charset="-78"/>
+                <a:ea typeface="Amiri" pitchFamily="2" charset="-78"/>
                 <a:cs typeface="Amiri" pitchFamily="2" charset="-78"/>
               </a:rPr>
               <a:t>كُنْتُ … أَمَّا الآنَ فَأَنَامُ …</a:t>
@@ -39079,6 +39319,7 @@
                   <a:srgbClr val="1B3B6F"/>
                 </a:solidFill>
                 <a:latin typeface="Amiri" pitchFamily="2" charset="-78"/>
+                <a:ea typeface="Amiri" pitchFamily="2" charset="-78"/>
                 <a:cs typeface="Amiri" pitchFamily="2" charset="-78"/>
               </a:rPr>
               <a:t>بَدَأْتُ</a:t>
@@ -39182,6 +39423,7 @@
                   <a:srgbClr val="1B3B6F"/>
                 </a:solidFill>
                 <a:latin typeface="Amiri" pitchFamily="2" charset="-78"/>
+                <a:ea typeface="Amiri" pitchFamily="2" charset="-78"/>
                 <a:cs typeface="Amiri" pitchFamily="2" charset="-78"/>
               </a:rPr>
               <a:t>سَوْفَ</a:t>
@@ -39447,6 +39689,7 @@
                   <a:srgbClr val="1B3B6F"/>
                 </a:solidFill>
                 <a:latin typeface="Amiri" pitchFamily="2" charset="-78"/>
+                <a:ea typeface="Amiri" pitchFamily="2" charset="-78"/>
                 <a:cs typeface="Amiri" pitchFamily="2" charset="-78"/>
               </a:rPr>
               <a:t>صَحِيحٌ أَنَّ … غَيْرَ أَنَّ …</a:t>
@@ -39604,6 +39847,7 @@
                   <a:srgbClr val="1B3B6F"/>
                 </a:solidFill>
                 <a:latin typeface="Amiri" pitchFamily="2" charset="-78"/>
+                <a:ea typeface="Amiri" pitchFamily="2" charset="-78"/>
                 <a:cs typeface="Amiri" pitchFamily="2" charset="-78"/>
               </a:rPr>
               <a:t>مِمَّا</a:t>
@@ -39707,6 +39951,7 @@
                   <a:srgbClr val="1B3B6F"/>
                 </a:solidFill>
                 <a:latin typeface="Amiri" pitchFamily="2" charset="-78"/>
+                <a:ea typeface="Amiri" pitchFamily="2" charset="-78"/>
                 <a:cs typeface="Amiri" pitchFamily="2" charset="-78"/>
               </a:rPr>
               <a:t>لَوْ كُنْتُ طَبِيبًا لَنَصَحْتُ</a:t>
@@ -39840,6 +40085,7 @@
                   <a:srgbClr val="D4AF37"/>
                 </a:solidFill>
                 <a:latin typeface="Amiri" pitchFamily="2" charset="-78"/>
+                <a:ea typeface="Amiri" pitchFamily="2" charset="-78"/>
                 <a:cs typeface="Amiri" pitchFamily="2" charset="-78"/>
               </a:rPr>
               <a:t>م</a:t>
@@ -40160,6 +40406,7 @@
                   <a:srgbClr val="8A6D1E"/>
                 </a:solidFill>
                 <a:latin typeface="Amiri" pitchFamily="2" charset="-78"/>
+                <a:ea typeface="Amiri" pitchFamily="2" charset="-78"/>
                 <a:cs typeface="Amiri" pitchFamily="2" charset="-78"/>
               </a:rPr>
               <a:t>فِي الغُرَفِ</a:t>
@@ -41336,6 +41583,7 @@
                   <a:srgbClr val="1B3B6F"/>
                 </a:solidFill>
                 <a:latin typeface="Amiri" pitchFamily="2" charset="-78"/>
+                <a:ea typeface="Amiri" pitchFamily="2" charset="-78"/>
                 <a:cs typeface="Amiri" pitchFamily="2" charset="-78"/>
               </a:rPr>
               <a:t>دَوْرُكَ!</a:t>
@@ -41412,6 +41660,7 @@
                   <a:srgbClr val="1B3B6F"/>
                 </a:solidFill>
                 <a:latin typeface="Amiri" pitchFamily="2" charset="-78"/>
+                <a:ea typeface="Amiri" pitchFamily="2" charset="-78"/>
                 <a:cs typeface="Amiri" pitchFamily="2" charset="-78"/>
               </a:rPr>
               <a:t>أَحْسَنْتَ! / أَحْسَنْتِ!</a:t>
@@ -41488,6 +41737,7 @@
                   <a:srgbClr val="1B3B6F"/>
                 </a:solidFill>
                 <a:latin typeface="Amiri" pitchFamily="2" charset="-78"/>
+                <a:ea typeface="Amiri" pitchFamily="2" charset="-78"/>
                 <a:cs typeface="Amiri" pitchFamily="2" charset="-78"/>
               </a:rPr>
               <a:t>تَكَلَّمْ أَكْثَرَ، مِنْ فَضْلِكَ</a:t>
@@ -41564,6 +41814,7 @@
                   <a:srgbClr val="1B3B6F"/>
                 </a:solidFill>
                 <a:latin typeface="Amiri" pitchFamily="2" charset="-78"/>
+                <a:ea typeface="Amiri" pitchFamily="2" charset="-78"/>
                 <a:cs typeface="Amiri" pitchFamily="2" charset="-78"/>
               </a:rPr>
               <a:t>لِمَاذَا؟</a:t>
@@ -41735,6 +41986,7 @@
                   <a:srgbClr val="D4AF37"/>
                 </a:solidFill>
                 <a:latin typeface="Amiri" pitchFamily="2" charset="-78"/>
+                <a:ea typeface="Amiri" pitchFamily="2" charset="-78"/>
                 <a:cs typeface="Amiri" pitchFamily="2" charset="-78"/>
               </a:rPr>
               <a:t>م</a:t>
@@ -42055,6 +42307,7 @@
                   <a:srgbClr val="8A6D1E"/>
                 </a:solidFill>
                 <a:latin typeface="Amiri" pitchFamily="2" charset="-78"/>
+                <a:ea typeface="Amiri" pitchFamily="2" charset="-78"/>
                 <a:cs typeface="Amiri" pitchFamily="2" charset="-78"/>
               </a:rPr>
               <a:t>فِي المَقْهَى</a:t>
@@ -42335,6 +42588,7 @@
                   <a:srgbClr val="1B3B6F"/>
                 </a:solidFill>
                 <a:latin typeface="Amiri" pitchFamily="2" charset="-78"/>
+                <a:ea typeface="Amiri" pitchFamily="2" charset="-78"/>
                 <a:cs typeface="Amiri" pitchFamily="2" charset="-78"/>
               </a:rPr>
               <a:t>نَحْنُ …</a:t>
@@ -42411,6 +42665,7 @@
                   <a:srgbClr val="1B3B6F"/>
                 </a:solidFill>
                 <a:latin typeface="Amiri" pitchFamily="2" charset="-78"/>
+                <a:ea typeface="Amiri" pitchFamily="2" charset="-78"/>
                 <a:cs typeface="Amiri" pitchFamily="2" charset="-78"/>
               </a:rPr>
               <a:t>أَهْلًا وَسَهْلًا! كَمْ شَخْصًا؟</a:t>
@@ -42579,6 +42834,7 @@
                   <a:srgbClr val="1B3B6F"/>
                 </a:solidFill>
                 <a:latin typeface="Amiri" pitchFamily="2" charset="-78"/>
+                <a:ea typeface="Amiri" pitchFamily="2" charset="-78"/>
                 <a:cs typeface="Amiri" pitchFamily="2" charset="-78"/>
               </a:rPr>
               <a:t>أُرِيدُ … مِنْ فَضْلِكَ</a:t>
@@ -42655,6 +42911,7 @@
                   <a:srgbClr val="1B3B6F"/>
                 </a:solidFill>
                 <a:latin typeface="Amiri" pitchFamily="2" charset="-78"/>
+                <a:ea typeface="Amiri" pitchFamily="2" charset="-78"/>
                 <a:cs typeface="Amiri" pitchFamily="2" charset="-78"/>
               </a:rPr>
               <a:t>تَفَضَّلُوا. مَاذَا تُرِيدُ أَنْ تَأْكُلَ؟</a:t>
@@ -42823,6 +43080,7 @@
                   <a:srgbClr val="1B3B6F"/>
                 </a:solidFill>
                 <a:latin typeface="Amiri" pitchFamily="2" charset="-78"/>
+                <a:ea typeface="Amiri" pitchFamily="2" charset="-78"/>
                 <a:cs typeface="Amiri" pitchFamily="2" charset="-78"/>
               </a:rPr>
               <a:t>أَشْرَبُ …</a:t>
@@ -42899,6 +43157,7 @@
                   <a:srgbClr val="1B3B6F"/>
                 </a:solidFill>
                 <a:latin typeface="Amiri" pitchFamily="2" charset="-78"/>
+                <a:ea typeface="Amiri" pitchFamily="2" charset="-78"/>
                 <a:cs typeface="Amiri" pitchFamily="2" charset="-78"/>
               </a:rPr>
               <a:t>وَمَاذَا تَشْرَبُ؟</a:t>
@@ -43067,6 +43326,7 @@
                   <a:srgbClr val="1B3B6F"/>
                 </a:solidFill>
                 <a:latin typeface="Amiri" pitchFamily="2" charset="-78"/>
+                <a:ea typeface="Amiri" pitchFamily="2" charset="-78"/>
                 <a:cs typeface="Amiri" pitchFamily="2" charset="-78"/>
               </a:rPr>
               <a:t>كَمِ …؟</a:t>
@@ -43143,6 +43403,7 @@
                   <a:srgbClr val="1B3B6F"/>
                 </a:solidFill>
                 <a:latin typeface="Amiri" pitchFamily="2" charset="-78"/>
+                <a:ea typeface="Amiri" pitchFamily="2" charset="-78"/>
                 <a:cs typeface="Amiri" pitchFamily="2" charset="-78"/>
               </a:rPr>
               <a:t>حَسَنًا.</a:t>
@@ -43311,6 +43572,7 @@
                   <a:srgbClr val="1B3B6F"/>
                 </a:solidFill>
                 <a:latin typeface="Amiri" pitchFamily="2" charset="-78"/>
+                <a:ea typeface="Amiri" pitchFamily="2" charset="-78"/>
                 <a:cs typeface="Amiri" pitchFamily="2" charset="-78"/>
               </a:rPr>
               <a:t>لَا، آكُلُ فِي المَطْعَمِ مَرَّةً فِي …</a:t>
@@ -43387,6 +43649,7 @@
                   <a:srgbClr val="1B3B6F"/>
                 </a:solidFill>
                 <a:latin typeface="Amiri" pitchFamily="2" charset="-78"/>
+                <a:ea typeface="Amiri" pitchFamily="2" charset="-78"/>
                 <a:cs typeface="Amiri" pitchFamily="2" charset="-78"/>
               </a:rPr>
               <a:t>خَمْسَةَ عَشَرَ جُنَيْهًا. هَلْ تَأْكُلُ فِي المَطَاعِمِ كَثِيرًا؟</a:t>
@@ -43661,6 +43924,7 @@
                   <a:srgbClr val="D4AF37"/>
                 </a:solidFill>
                 <a:latin typeface="Amiri" pitchFamily="2" charset="-78"/>
+                <a:ea typeface="Amiri" pitchFamily="2" charset="-78"/>
                 <a:cs typeface="Amiri" pitchFamily="2" charset="-78"/>
               </a:rPr>
               <a:t>م</a:t>
@@ -43981,6 +44245,7 @@
                   <a:srgbClr val="8A6D1E"/>
                 </a:solidFill>
                 <a:latin typeface="Amiri" pitchFamily="2" charset="-78"/>
+                <a:ea typeface="Amiri" pitchFamily="2" charset="-78"/>
                 <a:cs typeface="Amiri" pitchFamily="2" charset="-78"/>
               </a:rPr>
               <a:t>فِي الصَّيْدَلِيَّةِ</a:t>
@@ -44261,6 +44526,7 @@
                   <a:srgbClr val="1B3B6F"/>
                 </a:solidFill>
                 <a:latin typeface="Amiri" pitchFamily="2" charset="-78"/>
+                <a:ea typeface="Amiri" pitchFamily="2" charset="-78"/>
                 <a:cs typeface="Amiri" pitchFamily="2" charset="-78"/>
               </a:rPr>
               <a:t>يُؤْلِمُنِي … وَعِنْدِي …</a:t>
@@ -44337,6 +44603,7 @@
                   <a:srgbClr val="1B3B6F"/>
                 </a:solidFill>
                 <a:latin typeface="Amiri" pitchFamily="2" charset="-78"/>
+                <a:ea typeface="Amiri" pitchFamily="2" charset="-78"/>
                 <a:cs typeface="Amiri" pitchFamily="2" charset="-78"/>
               </a:rPr>
               <a:t>صَبَاحَ الخَيْرِ، مَاذَا بِكَ؟</a:t>
@@ -44505,6 +44772,7 @@
                   <a:srgbClr val="1B3B6F"/>
                 </a:solidFill>
                 <a:latin typeface="Amiri" pitchFamily="2" charset="-78"/>
+                <a:ea typeface="Amiri" pitchFamily="2" charset="-78"/>
                 <a:cs typeface="Amiri" pitchFamily="2" charset="-78"/>
               </a:rPr>
               <a:t>مُنْذُ …</a:t>
@@ -44581,6 +44849,7 @@
                   <a:srgbClr val="1B3B6F"/>
                 </a:solidFill>
                 <a:latin typeface="Amiri" pitchFamily="2" charset="-78"/>
+                <a:ea typeface="Amiri" pitchFamily="2" charset="-78"/>
                 <a:cs typeface="Amiri" pitchFamily="2" charset="-78"/>
               </a:rPr>
               <a:t>مُنْذُ مَتَى؟</a:t>
@@ -44749,6 +45018,7 @@
                   <a:srgbClr val="1B3B6F"/>
                 </a:solidFill>
                 <a:latin typeface="Amiri" pitchFamily="2" charset="-78"/>
+                <a:ea typeface="Amiri" pitchFamily="2" charset="-78"/>
                 <a:cs typeface="Amiri" pitchFamily="2" charset="-78"/>
               </a:rPr>
               <a:t>نَعَمْ / لَا، أَخَذْتُ … / شَرِبْتُ …</a:t>
@@ -44825,6 +45095,7 @@
                   <a:srgbClr val="1B3B6F"/>
                 </a:solidFill>
                 <a:latin typeface="Amiri" pitchFamily="2" charset="-78"/>
+                <a:ea typeface="Amiri" pitchFamily="2" charset="-78"/>
                 <a:cs typeface="Amiri" pitchFamily="2" charset="-78"/>
               </a:rPr>
               <a:t>هَلْ أَخَذْتَ دَوَاءً؟</a:t>
@@ -44928,6 +45199,7 @@
                   <a:srgbClr val="1B3B6F"/>
                 </a:solidFill>
                 <a:latin typeface="Amiri" pitchFamily="2" charset="-78"/>
+                <a:ea typeface="Amiri" pitchFamily="2" charset="-78"/>
                 <a:cs typeface="Amiri" pitchFamily="2" charset="-78"/>
               </a:rPr>
               <a:t>كَمْ مَرَّةً …؟</a:t>
@@ -45004,6 +45276,7 @@
                   <a:srgbClr val="1B3B6F"/>
                 </a:solidFill>
                 <a:latin typeface="Amiri" pitchFamily="2" charset="-78"/>
+                <a:ea typeface="Amiri" pitchFamily="2" charset="-78"/>
                 <a:cs typeface="Amiri" pitchFamily="2" charset="-78"/>
               </a:rPr>
               <a:t>خُذْ هٰذَا الدَّوَاءَ.</a:t>
@@ -45107,6 +45380,7 @@
                   <a:srgbClr val="1B3B6F"/>
                 </a:solidFill>
                 <a:latin typeface="Amiri" pitchFamily="2" charset="-78"/>
+                <a:ea typeface="Amiri" pitchFamily="2" charset="-78"/>
                 <a:cs typeface="Amiri" pitchFamily="2" charset="-78"/>
               </a:rPr>
               <a:t>لَا، سَأَبْقَى … لِأَنَّ …</a:t>
@@ -45183,6 +45457,7 @@
                   <a:srgbClr val="1B3B6F"/>
                 </a:solidFill>
                 <a:latin typeface="Amiri" pitchFamily="2" charset="-78"/>
+                <a:ea typeface="Amiri" pitchFamily="2" charset="-78"/>
                 <a:cs typeface="Amiri" pitchFamily="2" charset="-78"/>
               </a:rPr>
               <a:t>ثَلَاثَ مَرَّاتٍ بَعْدَ الأَكْلِ. هَلْ تَذْهَبُ إِلَى المَدْرَسَةِ غَدًا؟</a:t>
@@ -45357,13 +45632,9 @@
     <a:fontScheme name="Office">
       <a:majorFont>
         <a:latin typeface="Calibri Light" panose="020F0302020204030204"/>
-        <a:ea typeface=""/>
-        <a:cs typeface=""/>
-        <a:font script="Jpan" typeface="游ゴシック Light"/>
-        <a:font script="Hang" typeface="맑은 고딕"/>
-        <a:font script="Hans" typeface="等线 Light"/>
-        <a:font script="Hant" typeface="新細明體"/>
-        <a:font script="Arab" typeface="Times New Roman"/>
+        <a:ea typeface="Amiri" pitchFamily="2" charset="-78"/>
+        <a:cs typeface="Amiri" pitchFamily="2" charset="-78"/>
+        <a:font script="Arab" typeface="Amiri"/>
         <a:font script="Hebr" typeface="Times New Roman"/>
         <a:font script="Thai" typeface="Angsana New"/>
         <a:font script="Ethi" typeface="Nyala"/>
@@ -45409,13 +45680,9 @@
       </a:majorFont>
       <a:minorFont>
         <a:latin typeface="Calibri" panose="020F0502020204030204"/>
-        <a:ea typeface=""/>
-        <a:cs typeface=""/>
-        <a:font script="Jpan" typeface="游ゴシック"/>
-        <a:font script="Hang" typeface="맑은 고딕"/>
-        <a:font script="Hans" typeface="等线"/>
-        <a:font script="Hant" typeface="新細明體"/>
-        <a:font script="Arab" typeface="Arial"/>
+        <a:ea typeface="Amiri" pitchFamily="2" charset="-78"/>
+        <a:cs typeface="Amiri" pitchFamily="2" charset="-78"/>
+        <a:font script="Arab" typeface="Amiri"/>
         <a:font script="Hebr" typeface="Arial"/>
         <a:font script="Thai" typeface="Cordia New"/>
         <a:font script="Ethi" typeface="Nyala"/>
